--- a/preview/indice_SP_500/indice_SP_500.pptx
+++ b/preview/indice_SP_500/indice_SP_500.pptx
@@ -3469,7 +3469,7 @@
                   <a:srgbClr val="FFFFFF"/>
                 </a:solidFill>
               </a:rPr>
-              <a:t>6 400</a:t>
+              <a:t>6 390</a:t>
             </a:r>
           </a:p>
         </p:txBody>
@@ -3580,7 +3580,7 @@
                   <a:srgbClr val="FFFFFF"/>
                 </a:solidFill>
               </a:rPr>
-              <a:t>-6.7%</a:t>
+              <a:t>-6.8%</a:t>
             </a:r>
           </a:p>
         </p:txBody>
@@ -6407,7 +6407,7 @@
                             <a:srgbClr val="1A1A1A"/>
                           </a:solidFill>
                         </a:rPr>
-                        <a:t>Consumer Staples</a:t>
+                        <a:t>Cons. Staples</a:t>
                       </a:r>
                     </a:p>
                   </a:txBody>
@@ -9735,7 +9735,7 @@
                   <a:srgbClr val="555555"/>
                 </a:solidFill>
               </a:rPr>
-              <a:t>Performance YTD +25.0% — momentum sectoriel positif</a:t>
+              <a:t>Performance YTD +24.6% — momentum sectoriel positif</a:t>
             </a:r>
           </a:p>
         </p:txBody>
@@ -10759,7 +10759,7 @@
                   <a:srgbClr val="555555"/>
                 </a:solidFill>
               </a:rPr>
-              <a:t>Performance YTD +23.7% — momentum sectoriel positif</a:t>
+              <a:t>Performance YTD +23.3% — momentum sectoriel positif</a:t>
             </a:r>
           </a:p>
         </p:txBody>
@@ -15256,7 +15256,7 @@
                             <a:srgbClr val="1A1A1A"/>
                           </a:solidFill>
                         </a:rPr>
-                        <a:t>Communication Servic</a:t>
+                        <a:t>Comm. Services</a:t>
                       </a:r>
                     </a:p>
                   </a:txBody>
@@ -15368,7 +15368,7 @@
                             <a:srgbClr val="1A1A1A"/>
                           </a:solidFill>
                         </a:rPr>
-                        <a:t>Consumer Discretiona</a:t>
+                        <a:t>Cons. Discret.</a:t>
                       </a:r>
                     </a:p>
                   </a:txBody>
@@ -15584,7 +15584,7 @@
                             <a:srgbClr val="1A1A1A"/>
                           </a:solidFill>
                         </a:rPr>
-                        <a:t>Consumer Staples</a:t>
+                        <a:t>Cons. Staples</a:t>
                       </a:r>
                     </a:p>
                   </a:txBody>
@@ -16851,7 +16851,7 @@
                   <a:srgbClr val="555555"/>
                 </a:solidFill>
               </a:rPr>
-              <a:t>Analyse semantique FinBERT  ·  420 articles  ·  7 jours glissants  ·  11 secteurs</a:t>
+              <a:t>Analyse semantique FinBERT  ·  34 articles  ·  7 jours glissants  ·  11 secteurs</a:t>
             </a:r>
           </a:p>
         </p:txBody>
@@ -17096,7 +17096,7 @@
         <p:spPr>
           <a:xfrm>
             <a:off x="2592000" y="827999"/>
-            <a:ext cx="1123200" cy="360000"/>
+            <a:ext cx="1235520" cy="360000"/>
           </a:xfrm>
           <a:prstGeom prst="rect">
             <a:avLst/>
@@ -17193,7 +17193,7 @@
                   <a:srgbClr val="FFFFFF"/>
                 </a:solidFill>
               </a:rPr>
-              <a:t>168 articles (40 %)</a:t>
+              <a:t>15 articles (44 %)</a:t>
             </a:r>
           </a:p>
         </p:txBody>
@@ -17250,7 +17250,7 @@
         <p:spPr>
           <a:xfrm>
             <a:off x="2592000" y="1242000"/>
-            <a:ext cx="1263600" cy="360000"/>
+            <a:ext cx="982800" cy="360000"/>
           </a:xfrm>
           <a:prstGeom prst="rect">
             <a:avLst/>
@@ -17347,7 +17347,7 @@
                   <a:srgbClr val="FFFFFF"/>
                 </a:solidFill>
               </a:rPr>
-              <a:t>189 articles (45 %)</a:t>
+              <a:t>12 articles (35 %)</a:t>
             </a:r>
           </a:p>
         </p:txBody>
@@ -17404,7 +17404,7 @@
         <p:spPr>
           <a:xfrm>
             <a:off x="2592000" y="1655999"/>
-            <a:ext cx="421200" cy="360000"/>
+            <a:ext cx="589680" cy="360000"/>
           </a:xfrm>
           <a:prstGeom prst="rect">
             <a:avLst/>
@@ -17501,7 +17501,7 @@
                   <a:srgbClr val="FFFFFF"/>
                 </a:solidFill>
               </a:rPr>
-              <a:t>63 articles (15 %)</a:t>
+              <a:t>7 articles (21 %)</a:t>
             </a:r>
           </a:p>
         </p:txBody>
@@ -17612,7 +17612,7 @@
                   <a:srgbClr val="555555"/>
                 </a:solidFill>
               </a:rPr>
-              <a:t>+ —</a:t>
+              <a:t>+ Resultats T4  ·  Cycle IA  ·  Innovation semi</a:t>
             </a:r>
           </a:p>
         </p:txBody>
@@ -17689,7 +17689,7 @@
                   <a:srgbClr val="555555"/>
                 </a:solidFill>
               </a:rPr>
-              <a:t>- —</a:t>
+              <a:t>- Regulation  ·  Taux LT  ·  CRE</a:t>
             </a:r>
           </a:p>
         </p:txBody>
@@ -18449,7 +18449,7 @@
                   <a:srgbClr val="555555"/>
                 </a:solidFill>
               </a:rPr>
-              <a:t>Cours : 6 400  ·  YTD : -6.7%  ·  P/E Forward : —  ·  Croissance BPA : +8.5%  ·  Conviction 55 %</a:t>
+              <a:t>Cours : 6 390  ·  YTD : -6.8%  ·  P/E Forward : —  ·  Croissance BPA : +8.5%  ·  Conviction 55 %</a:t>
             </a:r>
           </a:p>
         </p:txBody>
@@ -19013,7 +19013,7 @@
                   <a:srgbClr val="555555"/>
                 </a:solidFill>
               </a:rPr>
-              <a:t>Le signal global sur le S&amp;P 500 est Neutre avec une conviction de 27% (sur la base des 11 secteurs analyses). 3 secteurs ressortent Surponderer — Technology, Health Care et Financials — portes respectivement par le cycle IA, le pricing power defensif et les spreads de credit eleves. 6 secteurs sont Neutre en raison d'une visibilite limitee sur les BPA dans un contexte de taux restrictifs. 2 secteu</a:t>
+              <a:t>Le signal global sur le S&amp;P 500 est Surponderer avec une conviction de 55% (sur la base des 11 secteurs analyses). 6 secteur(s) ressortent Surponderer — Technology, Communication Servic, Industrials — portes par leur momentum positif 52 semaines. 5 secteurs sont Neutre et 0 en Sous-ponderer.</a:t>
             </a:r>
           </a:p>
         </p:txBody>
@@ -19970,7 +19970,7 @@
                   <a:srgbClr val="1A7A4A"/>
                 </a:solidFill>
               </a:rPr>
-              <a:t>+25.0 %</a:t>
+              <a:t>+24.6 %</a:t>
             </a:r>
           </a:p>
         </p:txBody>
@@ -20081,7 +20081,7 @@
                   <a:srgbClr val="1A7A4A"/>
                 </a:solidFill>
               </a:rPr>
-              <a:t>+23.7 %</a:t>
+              <a:t>+23.3 %</a:t>
             </a:r>
           </a:p>
         </p:txBody>
@@ -20192,7 +20192,7 @@
                   <a:srgbClr val="1A7A4A"/>
                 </a:solidFill>
               </a:rPr>
-              <a:t>+19.7 %</a:t>
+              <a:t>+19.8 %</a:t>
             </a:r>
           </a:p>
         </p:txBody>
@@ -20414,7 +20414,7 @@
                   <a:srgbClr val="1A7A4A"/>
                 </a:solidFill>
               </a:rPr>
-              <a:t>+13.7 %</a:t>
+              <a:t>+13.4 %</a:t>
             </a:r>
           </a:p>
         </p:txBody>
@@ -20525,7 +20525,7 @@
                   <a:srgbClr val="1A7A4A"/>
                 </a:solidFill>
               </a:rPr>
-              <a:t>+8.7 %</a:t>
+              <a:t>+8.4 %</a:t>
             </a:r>
           </a:p>
         </p:txBody>
@@ -20636,7 +20636,7 @@
                   <a:srgbClr val="1A7A4A"/>
                 </a:solidFill>
               </a:rPr>
-              <a:t>+4.4 %</a:t>
+              <a:t>+4.5 %</a:t>
             </a:r>
           </a:p>
         </p:txBody>
@@ -23240,7 +23240,7 @@
                             <a:srgbClr val="1A1A1A"/>
                           </a:solidFill>
                         </a:rPr>
-                        <a:t>6 400</a:t>
+                        <a:t>6 390</a:t>
                       </a:r>
                     </a:p>
                   </a:txBody>
@@ -23284,7 +23284,7 @@
                             <a:srgbClr val="1A1A1A"/>
                           </a:solidFill>
                         </a:rPr>
-                        <a:t>-6.7%</a:t>
+                        <a:t>-6.8%</a:t>
                       </a:r>
                     </a:p>
                   </a:txBody>
@@ -24847,7 +24847,7 @@
                   <a:srgbClr val="555555"/>
                 </a:solidFill>
               </a:rPr>
-              <a:t>Le P/E Forward a 21.5x s'inscrit en prime de 18% par rapport a la mediane 10 ans (18.2x), justifie en partie par la monetisation de l'IA et la qualite superieure des marges. L'ERP ressort a 4.2% — niveau attractif mais contraint par le 10Y US a 4.3%. La compression de multiple reste le principal risque si les taux LT d</a:t>
+              <a:t>Le P/E Forward a 21.5x s'inscrit en prime de 18% par rapport a la mediane 10 ans (18.2x), justifie en partie par la monetisation de l'IA et la qualite superieure des marges. L'ERP ressort a 4.2% — niveau attractif mais contraint par le 10Y US a 4.3%. La compression de multiple reste le principal risque si les taux LT...</a:t>
             </a:r>
           </a:p>
         </p:txBody>
@@ -25694,7 +25694,7 @@
                   <a:srgbClr val="AAAAAA"/>
                 </a:solidFill>
               </a:rPr>
-              <a:t>L'analyse des indicateurs avancees positionne le cycle en phase d'expansion avancee : ISM Manufacturier autour du seuil 50 (49.8), courbe des taux partiellement normalisee (10Y-2Y +0.2%), Leading Indicators OCDE en legere hausse. Cette configuration favorise les secteurs avec for</a:t>
+              <a:t>L'analyse des indicateurs avancees positionne le cycle en phase d'expansion avancee : ISM Manufacturier autour du seuil 50 (49.8), courbe...</a:t>
             </a:r>
           </a:p>
         </p:txBody>
@@ -26265,7 +26265,7 @@
                   <a:srgbClr val="555555"/>
                 </a:solidFill>
               </a:rPr>
-              <a:t>L'analyse des indicateurs avancees positionne le cycle en phase d'expansion avancee : ISM Manufacturier autour du seuil 50 (49.8), courbe des taux partiellement normalisee (10Y-2Y +0.2%), Leading Indi</a:t>
+              <a:t>L'analyse des indicateurs avancees positionne le cycle en phase d'expansion avancee : ISM Manufacturier autour du seuil 50 (49.8), courbe des taux partiellement normalisee (10Y-2Y +0.2%), Leading...</a:t>
             </a:r>
           </a:p>
         </p:txBody>
@@ -27422,7 +27422,7 @@
                             <a:srgbClr val="1A1A1A"/>
                           </a:solidFill>
                         </a:rPr>
-                        <a:t>22.0%</a:t>
+                        <a:t>24.0%</a:t>
                       </a:r>
                     </a:p>
                   </a:txBody>
@@ -27442,7 +27442,7 @@
                             <a:srgbClr val="1A1A1A"/>
                           </a:solidFill>
                         </a:rPr>
-                        <a:t>+8.0%</a:t>
+                        <a:t>-1.5%</a:t>
                       </a:r>
                     </a:p>
                   </a:txBody>
@@ -27594,7 +27594,7 @@
                             <a:srgbClr val="1A1A1A"/>
                           </a:solidFill>
                         </a:rPr>
-                        <a:t>22.0%</a:t>
+                        <a:t>27.0%</a:t>
                       </a:r>
                     </a:p>
                   </a:txBody>
@@ -27616,7 +27616,7 @@
                             <a:srgbClr val="1A1A1A"/>
                           </a:solidFill>
                         </a:rPr>
-                        <a:t>+8.0%</a:t>
+                        <a:t>+13.0%</a:t>
                       </a:r>
                     </a:p>
                   </a:txBody>
@@ -27638,7 +27638,7 @@
                             <a:srgbClr val="1A1A1A"/>
                           </a:solidFill>
                         </a:rPr>
-                        <a:t>+25.0%</a:t>
+                        <a:t>+24.6%</a:t>
                       </a:r>
                     </a:p>
                   </a:txBody>
@@ -27764,7 +27764,7 @@
                             <a:srgbClr val="1A1A1A"/>
                           </a:solidFill>
                         </a:rPr>
-                        <a:t>22.0%</a:t>
+                        <a:t>14.0%</a:t>
                       </a:r>
                     </a:p>
                   </a:txBody>
@@ -27784,7 +27784,7 @@
                             <a:srgbClr val="1A1A1A"/>
                           </a:solidFill>
                         </a:rPr>
-                        <a:t>+8.0%</a:t>
+                        <a:t>+6.5%</a:t>
                       </a:r>
                     </a:p>
                   </a:txBody>
@@ -27804,7 +27804,7 @@
                             <a:srgbClr val="1A1A1A"/>
                           </a:solidFill>
                         </a:rPr>
-                        <a:t>+23.7%</a:t>
+                        <a:t>+23.3%</a:t>
                       </a:r>
                     </a:p>
                   </a:txBody>
@@ -27936,7 +27936,7 @@
                             <a:srgbClr val="1A1A1A"/>
                           </a:solidFill>
                         </a:rPr>
-                        <a:t>22.0%</a:t>
+                        <a:t>28.0%</a:t>
                       </a:r>
                     </a:p>
                   </a:txBody>
@@ -27958,7 +27958,7 @@
                             <a:srgbClr val="1A1A1A"/>
                           </a:solidFill>
                         </a:rPr>
-                        <a:t>+8.0%</a:t>
+                        <a:t>+2.5%</a:t>
                       </a:r>
                     </a:p>
                   </a:txBody>
@@ -27980,7 +27980,7 @@
                             <a:srgbClr val="1A1A1A"/>
                           </a:solidFill>
                         </a:rPr>
-                        <a:t>+19.7%</a:t>
+                        <a:t>+19.8%</a:t>
                       </a:r>
                     </a:p>
                   </a:txBody>
@@ -28106,7 +28106,7 @@
                             <a:srgbClr val="1A1A1A"/>
                           </a:solidFill>
                         </a:rPr>
-                        <a:t>22.0%</a:t>
+                        <a:t>16.0%</a:t>
                       </a:r>
                     </a:p>
                   </a:txBody>
@@ -28126,7 +28126,7 @@
                             <a:srgbClr val="1A1A1A"/>
                           </a:solidFill>
                         </a:rPr>
-                        <a:t>+8.0%</a:t>
+                        <a:t>+4.0%</a:t>
                       </a:r>
                     </a:p>
                   </a:txBody>
@@ -28278,7 +28278,7 @@
                             <a:srgbClr val="1A1A1A"/>
                           </a:solidFill>
                         </a:rPr>
-                        <a:t>22.0%</a:t>
+                        <a:t>18.0%</a:t>
                       </a:r>
                     </a:p>
                   </a:txBody>
@@ -28300,7 +28300,7 @@
                             <a:srgbClr val="1A1A1A"/>
                           </a:solidFill>
                         </a:rPr>
-                        <a:t>+8.0%</a:t>
+                        <a:t>+6.0%</a:t>
                       </a:r>
                     </a:p>
                   </a:txBody>
@@ -28322,7 +28322,7 @@
                             <a:srgbClr val="1A1A1A"/>
                           </a:solidFill>
                         </a:rPr>
-                        <a:t>+13.7%</a:t>
+                        <a:t>+13.4%</a:t>
                       </a:r>
                     </a:p>
                   </a:txBody>
@@ -28448,7 +28448,7 @@
                             <a:srgbClr val="1A1A1A"/>
                           </a:solidFill>
                         </a:rPr>
-                        <a:t>22.0%</a:t>
+                        <a:t>18.0%</a:t>
                       </a:r>
                     </a:p>
                   </a:txBody>
@@ -28468,7 +28468,7 @@
                             <a:srgbClr val="1A1A1A"/>
                           </a:solidFill>
                         </a:rPr>
-                        <a:t>+8.0%</a:t>
+                        <a:t>+6.0%</a:t>
                       </a:r>
                     </a:p>
                   </a:txBody>
@@ -28488,7 +28488,7 @@
                             <a:srgbClr val="1A1A1A"/>
                           </a:solidFill>
                         </a:rPr>
-                        <a:t>+8.7%</a:t>
+                        <a:t>+8.4%</a:t>
                       </a:r>
                     </a:p>
                   </a:txBody>
@@ -28620,7 +28620,7 @@
                             <a:srgbClr val="1A1A1A"/>
                           </a:solidFill>
                         </a:rPr>
-                        <a:t>22.0%</a:t>
+                        <a:t>18.0%</a:t>
                       </a:r>
                     </a:p>
                   </a:txBody>
@@ -28642,7 +28642,7 @@
                             <a:srgbClr val="1A1A1A"/>
                           </a:solidFill>
                         </a:rPr>
-                        <a:t>+8.0%</a:t>
+                        <a:t>+9.5%</a:t>
                       </a:r>
                     </a:p>
                   </a:txBody>
@@ -28664,7 +28664,7 @@
                             <a:srgbClr val="1A1A1A"/>
                           </a:solidFill>
                         </a:rPr>
-                        <a:t>+4.4%</a:t>
+                        <a:t>+4.5%</a:t>
                       </a:r>
                     </a:p>
                   </a:txBody>
@@ -28708,7 +28708,7 @@
                             <a:srgbClr val="1A1A1A"/>
                           </a:solidFill>
                         </a:rPr>
-                        <a:t>Consumer Staples</a:t>
+                        <a:t>Cons. Staples</a:t>
                       </a:r>
                     </a:p>
                   </a:txBody>
@@ -28790,7 +28790,7 @@
                             <a:srgbClr val="1A1A1A"/>
                           </a:solidFill>
                         </a:rPr>
-                        <a:t>22.0%</a:t>
+                        <a:t>17.0%</a:t>
                       </a:r>
                     </a:p>
                   </a:txBody>
@@ -28810,7 +28810,7 @@
                             <a:srgbClr val="1A1A1A"/>
                           </a:solidFill>
                         </a:rPr>
-                        <a:t>+8.0%</a:t>
+                        <a:t>+3.5%</a:t>
                       </a:r>
                     </a:p>
                   </a:txBody>
@@ -28830,7 +28830,7 @@
                             <a:srgbClr val="1A1A1A"/>
                           </a:solidFill>
                         </a:rPr>
-                        <a:t>+3.2%</a:t>
+                        <a:t>+3.4%</a:t>
                       </a:r>
                     </a:p>
                   </a:txBody>
@@ -28962,7 +28962,7 @@
                             <a:srgbClr val="1A1A1A"/>
                           </a:solidFill>
                         </a:rPr>
-                        <a:t>22.0%</a:t>
+                        <a:t>42.0%</a:t>
                       </a:r>
                     </a:p>
                   </a:txBody>
@@ -28984,7 +28984,7 @@
                             <a:srgbClr val="1A1A1A"/>
                           </a:solidFill>
                         </a:rPr>
-                        <a:t>+8.0%</a:t>
+                        <a:t>+2.0%</a:t>
                       </a:r>
                     </a:p>
                   </a:txBody>
@@ -29006,7 +29006,7 @@
                             <a:srgbClr val="1A1A1A"/>
                           </a:solidFill>
                         </a:rPr>
-                        <a:t>+0.8%</a:t>
+                        <a:t>+0.9%</a:t>
                       </a:r>
                     </a:p>
                   </a:txBody>
@@ -29132,7 +29132,7 @@
                             <a:srgbClr val="1A1A1A"/>
                           </a:solidFill>
                         </a:rPr>
-                        <a:t>22.0%</a:t>
+                        <a:t>30.0%</a:t>
                       </a:r>
                     </a:p>
                   </a:txBody>
@@ -29152,7 +29152,7 @@
                             <a:srgbClr val="1A1A1A"/>
                           </a:solidFill>
                         </a:rPr>
-                        <a:t>+8.0%</a:t>
+                        <a:t>+10.0%</a:t>
                       </a:r>
                     </a:p>
                   </a:txBody>

--- a/preview/indice_SP_500/indice_SP_500.pptx
+++ b/preview/indice_SP_500/indice_SP_500.pptx
@@ -6013,7 +6013,7 @@
                             <a:srgbClr val="1A1A1A"/>
                           </a:solidFill>
                         </a:rPr>
-                        <a:t>Communication Servic</a:t>
+                        <a:t>Comm. Services</a:t>
                       </a:r>
                     </a:p>
                   </a:txBody>
@@ -6147,7 +6147,7 @@
                             <a:srgbClr val="1A1A1A"/>
                           </a:solidFill>
                         </a:rPr>
-                        <a:t>Consumer Discretiona</a:t>
+                        <a:t>Cons. Discret.</a:t>
                       </a:r>
                     </a:p>
                   </a:txBody>
@@ -10759,7 +10759,7 @@
                   <a:srgbClr val="555555"/>
                 </a:solidFill>
               </a:rPr>
-              <a:t>Performance YTD +23.3% — momentum sectoriel positif</a:t>
+              <a:t>Performance YTD +23.4% — momentum sectoriel positif</a:t>
             </a:r>
           </a:p>
         </p:txBody>
@@ -19013,7 +19013,7 @@
                   <a:srgbClr val="555555"/>
                 </a:solidFill>
               </a:rPr>
-              <a:t>Le signal global sur le S&amp;P 500 est Surponderer avec une conviction de 55% (sur la base des 11 secteurs analyses). 6 secteur(s) ressortent Surponderer — Technology, Communication Servic, Industrials — portes par leur momentum positif 52 semaines. 5 secteurs sont Neutre et 0 en Sous-ponderer.</a:t>
+              <a:t>Le signal global sur le S&amp;P 500 est Surponderer avec une conviction de 55% (sur la base des 11 secteurs analyses). 6 secteur(s) ressortent Surponderer — Technology, Communication Services, Energy — portes par leur momentum positif 52 semaines. 5 secteurs sont Neutre et 0 en Sous-ponderer.</a:t>
             </a:r>
           </a:p>
         </p:txBody>
@@ -20081,7 +20081,7 @@
                   <a:srgbClr val="1A7A4A"/>
                 </a:solidFill>
               </a:rPr>
-              <a:t>+23.3 %</a:t>
+              <a:t>+23.4 %</a:t>
             </a:r>
           </a:p>
         </p:txBody>
@@ -20303,7 +20303,7 @@
                   <a:srgbClr val="1A7A4A"/>
                 </a:solidFill>
               </a:rPr>
-              <a:t>+19.3 %</a:t>
+              <a:t>+19.2 %</a:t>
             </a:r>
           </a:p>
         </p:txBody>
@@ -20414,7 +20414,7 @@
                   <a:srgbClr val="1A7A4A"/>
                 </a:solidFill>
               </a:rPr>
-              <a:t>+13.4 %</a:t>
+              <a:t>+13.5 %</a:t>
             </a:r>
           </a:p>
         </p:txBody>
@@ -27804,7 +27804,7 @@
                             <a:srgbClr val="1A1A1A"/>
                           </a:solidFill>
                         </a:rPr>
-                        <a:t>+23.3%</a:t>
+                        <a:t>+23.4%</a:t>
                       </a:r>
                     </a:p>
                   </a:txBody>
@@ -28146,7 +28146,7 @@
                             <a:srgbClr val="1A1A1A"/>
                           </a:solidFill>
                         </a:rPr>
-                        <a:t>+19.3%</a:t>
+                        <a:t>+19.2%</a:t>
                       </a:r>
                     </a:p>
                   </a:txBody>
@@ -28190,7 +28190,7 @@
                             <a:srgbClr val="1A1A1A"/>
                           </a:solidFill>
                         </a:rPr>
-                        <a:t>Communication Servic</a:t>
+                        <a:t>Comm. Services</a:t>
                       </a:r>
                     </a:p>
                   </a:txBody>
@@ -28256,7 +28256,7 @@
                             <a:srgbClr val="1A1A1A"/>
                           </a:solidFill>
                         </a:rPr>
-                        <a:t>12.0x</a:t>
+                        <a:t>11.0x</a:t>
                       </a:r>
                     </a:p>
                   </a:txBody>
@@ -28278,7 +28278,7 @@
                             <a:srgbClr val="1A1A1A"/>
                           </a:solidFill>
                         </a:rPr>
-                        <a:t>18.0%</a:t>
+                        <a:t>23.0%</a:t>
                       </a:r>
                     </a:p>
                   </a:txBody>
@@ -28300,7 +28300,7 @@
                             <a:srgbClr val="1A1A1A"/>
                           </a:solidFill>
                         </a:rPr>
-                        <a:t>+6.0%</a:t>
+                        <a:t>+8.5%</a:t>
                       </a:r>
                     </a:p>
                   </a:txBody>
@@ -28322,7 +28322,7 @@
                             <a:srgbClr val="1A1A1A"/>
                           </a:solidFill>
                         </a:rPr>
-                        <a:t>+13.4%</a:t>
+                        <a:t>+13.5%</a:t>
                       </a:r>
                     </a:p>
                   </a:txBody>
@@ -28366,7 +28366,7 @@
                             <a:srgbClr val="1A1A1A"/>
                           </a:solidFill>
                         </a:rPr>
-                        <a:t>Consumer Discretiona</a:t>
+                        <a:t>Cons. Discret.</a:t>
                       </a:r>
                     </a:p>
                   </a:txBody>
@@ -28448,7 +28448,7 @@
                             <a:srgbClr val="1A1A1A"/>
                           </a:solidFill>
                         </a:rPr>
-                        <a:t>18.0%</a:t>
+                        <a:t>11.0%</a:t>
                       </a:r>
                     </a:p>
                   </a:txBody>
@@ -28468,7 +28468,7 @@
                             <a:srgbClr val="1A1A1A"/>
                           </a:solidFill>
                         </a:rPr>
-                        <a:t>+6.0%</a:t>
+                        <a:t>+7.5%</a:t>
                       </a:r>
                     </a:p>
                   </a:txBody>
@@ -28830,7 +28830,7 @@
                             <a:srgbClr val="1A1A1A"/>
                           </a:solidFill>
                         </a:rPr>
-                        <a:t>+3.4%</a:t>
+                        <a:t>+3.3%</a:t>
                       </a:r>
                     </a:p>
                   </a:txBody>

--- a/preview/indice_SP_500/indice_SP_500.pptx
+++ b/preview/indice_SP_500/indice_SP_500.pptx
@@ -3469,7 +3469,7 @@
                   <a:srgbClr val="FFFFFF"/>
                 </a:solidFill>
               </a:rPr>
-              <a:t>6 390</a:t>
+              <a:t>6 385</a:t>
             </a:r>
           </a:p>
         </p:txBody>
@@ -3580,7 +3580,7 @@
                   <a:srgbClr val="FFFFFF"/>
                 </a:solidFill>
               </a:rPr>
-              <a:t>-6.8%</a:t>
+              <a:t>-6.9%</a:t>
             </a:r>
           </a:p>
         </p:txBody>
@@ -5515,7 +5515,7 @@
                             <a:srgbClr val="1A1A1A"/>
                           </a:solidFill>
                         </a:rPr>
-                        <a:t>80</a:t>
+                        <a:t>79</a:t>
                       </a:r>
                     </a:p>
                   </a:txBody>
@@ -8711,7 +8711,7 @@
                   <a:srgbClr val="555555"/>
                 </a:solidFill>
               </a:rPr>
-              <a:t>Performance YTD +60.6% — momentum sectoriel positif</a:t>
+              <a:t>Performance YTD +60.7% — momentum sectoriel positif</a:t>
             </a:r>
           </a:p>
         </p:txBody>
@@ -9053,7 +9053,7 @@
                   <a:srgbClr val="1B3A6B"/>
                 </a:solidFill>
               </a:rPr>
-              <a:t>Score : 80/100  ·  EV/EBITDA : —</a:t>
+              <a:t>Score : 79/100  ·  EV/EBITDA : —</a:t>
             </a:r>
           </a:p>
         </p:txBody>
@@ -9266,7 +9266,7 @@
                   <a:srgbClr val="555555"/>
                 </a:solidFill>
               </a:rPr>
-              <a:t>77</a:t>
+              <a:t>76</a:t>
             </a:r>
           </a:p>
         </p:txBody>
@@ -9445,7 +9445,7 @@
                   <a:srgbClr val="555555"/>
                 </a:solidFill>
               </a:rPr>
-              <a:t>77</a:t>
+              <a:t>76</a:t>
             </a:r>
           </a:p>
         </p:txBody>
@@ -9624,7 +9624,7 @@
                   <a:srgbClr val="555555"/>
                 </a:solidFill>
               </a:rPr>
-              <a:t>77</a:t>
+              <a:t>76</a:t>
             </a:r>
           </a:p>
         </p:txBody>
@@ -9735,7 +9735,7 @@
                   <a:srgbClr val="555555"/>
                 </a:solidFill>
               </a:rPr>
-              <a:t>Performance YTD +24.6% — momentum sectoriel positif</a:t>
+              <a:t>Performance YTD +24.5% — momentum sectoriel positif</a:t>
             </a:r>
           </a:p>
         </p:txBody>
@@ -10759,7 +10759,7 @@
                   <a:srgbClr val="555555"/>
                 </a:solidFill>
               </a:rPr>
-              <a:t>Performance YTD +23.4% — momentum sectoriel positif</a:t>
+              <a:t>Performance YTD +23.2% — momentum sectoriel positif</a:t>
             </a:r>
           </a:p>
         </p:txBody>
@@ -16260,7 +16260,7 @@
                   <a:srgbClr val="555555"/>
                 </a:solidFill>
               </a:rPr>
-              <a:t>La rotation sectorielle recommandee s'appuie sur le modele cycle 4-phases FinSight. En phase d'expansion avancee, le signal Accumuler se concentre sur les secteurs a forte croissance BPA et pricing power : Technology (IA), Health Care (FDA pipeline), Financials (NIM). Le signal Alleger cible Real Estate (pression taux directe) et Utilities (compres</a:t>
+              <a:t>La rotation sectorielle recommandee s'appuie sur le modele cycle 4-phases FinSight. En phase d'expansion avancee, le signal Accumuler se concentre sur les secteurs a forte croissance BPA et pricing power : Technology (IA), Health Care (FDA pipeline), Financials (NIM). Le signal Alleger cible Real Estate (pression taux directe) et Utilities...</a:t>
             </a:r>
           </a:p>
         </p:txBody>
@@ -17464,7 +17464,7 @@
             <a:r>
               <a:rPr sz="850" b="1" i="0">
                 <a:solidFill>
-                  <a:srgbClr val="FFFFFF"/>
+                  <a:srgbClr val="1A1A1A"/>
                 </a:solidFill>
               </a:rPr>
               <a:t>Negatif</a:t>
@@ -17498,7 +17498,7 @@
             <a:r>
               <a:rPr sz="800" b="0" i="0">
                 <a:solidFill>
-                  <a:srgbClr val="FFFFFF"/>
+                  <a:srgbClr val="1A1A1A"/>
                 </a:solidFill>
               </a:rPr>
               <a:t>7 articles (21 %)</a:t>
@@ -18449,7 +18449,7 @@
                   <a:srgbClr val="555555"/>
                 </a:solidFill>
               </a:rPr>
-              <a:t>Cours : 6 390  ·  YTD : -6.8%  ·  P/E Forward : —  ·  Croissance BPA : +8.5%  ·  Conviction 55 %</a:t>
+              <a:t>Cours : 6 385  ·  YTD : -6.9%  ·  P/E Forward : —  ·  Croissance BPA : +8.5%  ·  Conviction 55 %</a:t>
             </a:r>
           </a:p>
         </p:txBody>
@@ -19013,7 +19013,7 @@
                   <a:srgbClr val="555555"/>
                 </a:solidFill>
               </a:rPr>
-              <a:t>Le signal global sur le S&amp;P 500 est Surponderer avec une conviction de 55% (sur la base des 11 secteurs analyses). 6 secteur(s) ressortent Surponderer — Technology, Communication Services, Energy — portes par leur momentum positif 52 semaines. 5 secteurs sont Neutre et 0 en Sous-ponderer.</a:t>
+              <a:t>Le signal global sur le S&amp;P 500 est Surponderer avec une conviction de 55% (sur la base des 11 secteurs analyses). 6 secteur(s) ressortent Surponderer — Technology, Communication Services, Industrials — portes par leur momentum positif 52 semaines. 5 secteurs sont Neutre et 0 en Sous-ponderer.</a:t>
             </a:r>
           </a:p>
         </p:txBody>
@@ -19859,7 +19859,7 @@
                   <a:srgbClr val="1A7A4A"/>
                 </a:solidFill>
               </a:rPr>
-              <a:t>+60.6 %</a:t>
+              <a:t>+60.7 %</a:t>
             </a:r>
           </a:p>
         </p:txBody>
@@ -19970,7 +19970,7 @@
                   <a:srgbClr val="1A7A4A"/>
                 </a:solidFill>
               </a:rPr>
-              <a:t>+24.6 %</a:t>
+              <a:t>+24.5 %</a:t>
             </a:r>
           </a:p>
         </p:txBody>
@@ -20081,7 +20081,7 @@
                   <a:srgbClr val="1A7A4A"/>
                 </a:solidFill>
               </a:rPr>
-              <a:t>+23.4 %</a:t>
+              <a:t>+23.2 %</a:t>
             </a:r>
           </a:p>
         </p:txBody>
@@ -20192,7 +20192,7 @@
                   <a:srgbClr val="1A7A4A"/>
                 </a:solidFill>
               </a:rPr>
-              <a:t>+19.8 %</a:t>
+              <a:t>+19.7 %</a:t>
             </a:r>
           </a:p>
         </p:txBody>
@@ -20303,7 +20303,7 @@
                   <a:srgbClr val="1A7A4A"/>
                 </a:solidFill>
               </a:rPr>
-              <a:t>+19.2 %</a:t>
+              <a:t>+19.1 %</a:t>
             </a:r>
           </a:p>
         </p:txBody>
@@ -20414,7 +20414,7 @@
                   <a:srgbClr val="1A7A4A"/>
                 </a:solidFill>
               </a:rPr>
-              <a:t>+13.5 %</a:t>
+              <a:t>+13.4 %</a:t>
             </a:r>
           </a:p>
         </p:txBody>
@@ -20525,7 +20525,7 @@
                   <a:srgbClr val="1A7A4A"/>
                 </a:solidFill>
               </a:rPr>
-              <a:t>+8.4 %</a:t>
+              <a:t>+8.2 %</a:t>
             </a:r>
           </a:p>
         </p:txBody>
@@ -20747,7 +20747,7 @@
                   <a:srgbClr val="555555"/>
                 </a:solidFill>
               </a:rPr>
-              <a:t>XLE (Energy) domine avec +60.6 % — confirmation du signal Surponderer soutenu par la monetisation IA. XLF (Financials) sous-performe (+0.2 %) en ligne avec le signal Sous-ponderer.</a:t>
+              <a:t>XLE (Energy) domine avec +60.7 % — confirmation du signal Surponderer soutenu par la monetisation IA. XLF (Financials) sous-performe (+0.1 %) en ligne avec le signal Sous-ponderer.</a:t>
             </a:r>
           </a:p>
         </p:txBody>
@@ -23240,7 +23240,7 @@
                             <a:srgbClr val="1A1A1A"/>
                           </a:solidFill>
                         </a:rPr>
-                        <a:t>6 390</a:t>
+                        <a:t>6 385</a:t>
                       </a:r>
                     </a:p>
                   </a:txBody>
@@ -23284,7 +23284,7 @@
                             <a:srgbClr val="1A1A1A"/>
                           </a:solidFill>
                         </a:rPr>
-                        <a:t>-6.8%</a:t>
+                        <a:t>-6.9%</a:t>
                       </a:r>
                     </a:p>
                   </a:txBody>
@@ -27462,7 +27462,7 @@
                             <a:srgbClr val="1A1A1A"/>
                           </a:solidFill>
                         </a:rPr>
-                        <a:t>+60.6%</a:t>
+                        <a:t>+60.7%</a:t>
                       </a:r>
                     </a:p>
                   </a:txBody>
@@ -27528,7 +27528,7 @@
                             <a:srgbClr val="1A1A1A"/>
                           </a:solidFill>
                         </a:rPr>
-                        <a:t>80</a:t>
+                        <a:t>79</a:t>
                       </a:r>
                     </a:p>
                   </a:txBody>
@@ -27638,7 +27638,7 @@
                             <a:srgbClr val="1A1A1A"/>
                           </a:solidFill>
                         </a:rPr>
-                        <a:t>+24.6%</a:t>
+                        <a:t>+24.5%</a:t>
                       </a:r>
                     </a:p>
                   </a:txBody>
@@ -27804,7 +27804,7 @@
                             <a:srgbClr val="1A1A1A"/>
                           </a:solidFill>
                         </a:rPr>
-                        <a:t>+23.4%</a:t>
+                        <a:t>+23.2%</a:t>
                       </a:r>
                     </a:p>
                   </a:txBody>
@@ -27980,7 +27980,7 @@
                             <a:srgbClr val="1A1A1A"/>
                           </a:solidFill>
                         </a:rPr>
-                        <a:t>+19.8%</a:t>
+                        <a:t>+19.7%</a:t>
                       </a:r>
                     </a:p>
                   </a:txBody>
@@ -28146,7 +28146,7 @@
                             <a:srgbClr val="1A1A1A"/>
                           </a:solidFill>
                         </a:rPr>
-                        <a:t>+19.2%</a:t>
+                        <a:t>+19.1%</a:t>
                       </a:r>
                     </a:p>
                   </a:txBody>
@@ -28322,7 +28322,7 @@
                             <a:srgbClr val="1A1A1A"/>
                           </a:solidFill>
                         </a:rPr>
-                        <a:t>+13.5%</a:t>
+                        <a:t>+13.4%</a:t>
                       </a:r>
                     </a:p>
                   </a:txBody>
@@ -28488,7 +28488,7 @@
                             <a:srgbClr val="1A1A1A"/>
                           </a:solidFill>
                         </a:rPr>
-                        <a:t>+8.4%</a:t>
+                        <a:t>+8.2%</a:t>
                       </a:r>
                     </a:p>
                   </a:txBody>
@@ -29006,7 +29006,7 @@
                             <a:srgbClr val="1A1A1A"/>
                           </a:solidFill>
                         </a:rPr>
-                        <a:t>+0.9%</a:t>
+                        <a:t>+0.8%</a:t>
                       </a:r>
                     </a:p>
                   </a:txBody>
@@ -29172,7 +29172,7 @@
                             <a:srgbClr val="1A1A1A"/>
                           </a:solidFill>
                         </a:rPr>
-                        <a:t>+0.2%</a:t>
+                        <a:t>+0.1%</a:t>
                       </a:r>
                     </a:p>
                   </a:txBody>
@@ -29334,7 +29334,7 @@
                   <a:srgbClr val="555555"/>
                 </a:solidFill>
               </a:rPr>
-              <a:t>Seuls 6 secteur(s) sur 11 franchissent le seuil Surponderer (score &gt; 65) : Energy · Technology · Industrials. 0 secteur(s) en Sous-ponderer. La dispersion des scores illustre une bifurcation sectorielle marquee.</a:t>
+              <a:t>Seuls 6 secteur(s) sur 11 franchissent le seuil Surponderer (score &gt; 65) : Energy · Technology · Industrials · Utilities · Materials · Communication Services. 0 secteur(s) en Sous-ponderer. La dispersion des scores illustre une bifurcation sectorielle marquee.</a:t>
             </a:r>
           </a:p>
         </p:txBody>

--- a/preview/indice_SP_500/indice_SP_500.pptx
+++ b/preview/indice_SP_500/indice_SP_500.pptx
@@ -3469,7 +3469,7 @@
                   <a:srgbClr val="FFFFFF"/>
                 </a:solidFill>
               </a:rPr>
-              <a:t>6 385</a:t>
+              <a:t>6 369</a:t>
             </a:r>
           </a:p>
         </p:txBody>
@@ -3580,7 +3580,7 @@
                   <a:srgbClr val="FFFFFF"/>
                 </a:solidFill>
               </a:rPr>
-              <a:t>-6.9%</a:t>
+              <a:t>-7.1%</a:t>
             </a:r>
           </a:p>
         </p:txBody>
@@ -3836,7 +3836,7 @@
                   <a:srgbClr val="AAAAAA"/>
                 </a:solidFill>
               </a:rPr>
-              <a:t>27 mars 2026</a:t>
+              <a:t>28 mars 2026</a:t>
             </a:r>
           </a:p>
         </p:txBody>
@@ -5775,7 +5775,7 @@
                             <a:srgbClr val="1A1A1A"/>
                           </a:solidFill>
                         </a:rPr>
-                        <a:t>74</a:t>
+                        <a:t>73</a:t>
                       </a:r>
                     </a:p>
                   </a:txBody>
@@ -5797,7 +5797,7 @@
                             <a:srgbClr val="1A1A1A"/>
                           </a:solidFill>
                         </a:rPr>
-                        <a:t>30</a:t>
+                        <a:t>29</a:t>
                       </a:r>
                     </a:p>
                   </a:txBody>
@@ -6427,7 +6427,7 @@
                             <a:srgbClr val="1A1A1A"/>
                           </a:solidFill>
                         </a:rPr>
-                        <a:t>54</a:t>
+                        <a:t>53</a:t>
                       </a:r>
                     </a:p>
                   </a:txBody>
@@ -6449,7 +6449,7 @@
                             <a:srgbClr val="1A1A1A"/>
                           </a:solidFill>
                         </a:rPr>
-                        <a:t>22</a:t>
+                        <a:t>21</a:t>
                       </a:r>
                     </a:p>
                   </a:txBody>
@@ -6533,7 +6533,7 @@
                             <a:srgbClr val="1A1A1A"/>
                           </a:solidFill>
                         </a:rPr>
-                        <a:t>Real Estate</a:t>
+                        <a:t>Financials</a:t>
                       </a:r>
                     </a:p>
                   </a:txBody>
@@ -6555,7 +6555,7 @@
                             <a:srgbClr val="1A1A1A"/>
                           </a:solidFill>
                         </a:rPr>
-                        <a:t>51</a:t>
+                        <a:t>50</a:t>
                       </a:r>
                     </a:p>
                   </a:txBody>
@@ -6667,7 +6667,7 @@
                             <a:srgbClr val="1A1A1A"/>
                           </a:solidFill>
                         </a:rPr>
-                        <a:t>Financials</a:t>
+                        <a:t>Real Estate</a:t>
                       </a:r>
                     </a:p>
                   </a:txBody>
@@ -8711,7 +8711,7 @@
                   <a:srgbClr val="555555"/>
                 </a:solidFill>
               </a:rPr>
-              <a:t>Performance YTD +60.7% — momentum sectoriel positif</a:t>
+              <a:t>Performance YTD +60.4% — momentum sectoriel positif</a:t>
             </a:r>
           </a:p>
         </p:txBody>
@@ -10759,7 +10759,7 @@
                   <a:srgbClr val="555555"/>
                 </a:solidFill>
               </a:rPr>
-              <a:t>Performance YTD +23.2% — momentum sectoriel positif</a:t>
+              <a:t>Performance YTD +23.0% — momentum sectoriel positif</a:t>
             </a:r>
           </a:p>
         </p:txBody>
@@ -18449,7 +18449,7 @@
                   <a:srgbClr val="555555"/>
                 </a:solidFill>
               </a:rPr>
-              <a:t>Cours : 6 385  ·  YTD : -6.9%  ·  P/E Forward : —  ·  Croissance BPA : +8.5%  ·  Conviction 55 %</a:t>
+              <a:t>Cours : 6 369  ·  YTD : -7.1%  ·  P/E Forward : —  ·  Croissance BPA : +8.5%  ·  Conviction 55 %</a:t>
             </a:r>
           </a:p>
         </p:txBody>
@@ -19859,7 +19859,7 @@
                   <a:srgbClr val="1A7A4A"/>
                 </a:solidFill>
               </a:rPr>
-              <a:t>+60.7 %</a:t>
+              <a:t>+60.4 %</a:t>
             </a:r>
           </a:p>
         </p:txBody>
@@ -20081,7 +20081,7 @@
                   <a:srgbClr val="1A7A4A"/>
                 </a:solidFill>
               </a:rPr>
-              <a:t>+23.2 %</a:t>
+              <a:t>+23.0 %</a:t>
             </a:r>
           </a:p>
         </p:txBody>
@@ -20192,7 +20192,7 @@
                   <a:srgbClr val="1A7A4A"/>
                 </a:solidFill>
               </a:rPr>
-              <a:t>+19.7 %</a:t>
+              <a:t>+18.9 %</a:t>
             </a:r>
           </a:p>
         </p:txBody>
@@ -20303,7 +20303,7 @@
                   <a:srgbClr val="1A7A4A"/>
                 </a:solidFill>
               </a:rPr>
-              <a:t>+19.1 %</a:t>
+              <a:t>+18.9 %</a:t>
             </a:r>
           </a:p>
         </p:txBody>
@@ -20414,7 +20414,7 @@
                   <a:srgbClr val="1A7A4A"/>
                 </a:solidFill>
               </a:rPr>
-              <a:t>+13.4 %</a:t>
+              <a:t>+13.5 %</a:t>
             </a:r>
           </a:p>
         </p:txBody>
@@ -20525,7 +20525,7 @@
                   <a:srgbClr val="1A7A4A"/>
                 </a:solidFill>
               </a:rPr>
-              <a:t>+8.2 %</a:t>
+              <a:t>+8.0 %</a:t>
             </a:r>
           </a:p>
         </p:txBody>
@@ -20636,7 +20636,7 @@
                   <a:srgbClr val="1A7A4A"/>
                 </a:solidFill>
               </a:rPr>
-              <a:t>+4.5 %</a:t>
+              <a:t>+3.8 %</a:t>
             </a:r>
           </a:p>
         </p:txBody>
@@ -20747,7 +20747,7 @@
                   <a:srgbClr val="555555"/>
                 </a:solidFill>
               </a:rPr>
-              <a:t>XLE (Energy) domine avec +60.7 % — confirmation du signal Surponderer soutenu par la monetisation IA. XLF (Financials) sous-performe (+0.1 %) en ligne avec le signal Sous-ponderer.</a:t>
+              <a:t>XLE (Energy) domine avec +60.4 % — confirmation du signal Surponderer soutenu par la monetisation IA. XLF (Financials) sous-performe (-0.4 %) en ligne avec le signal Sous-ponderer.</a:t>
             </a:r>
           </a:p>
         </p:txBody>
@@ -23240,7 +23240,7 @@
                             <a:srgbClr val="1A1A1A"/>
                           </a:solidFill>
                         </a:rPr>
-                        <a:t>6 385</a:t>
+                        <a:t>6 369</a:t>
                       </a:r>
                     </a:p>
                   </a:txBody>
@@ -23284,7 +23284,7 @@
                             <a:srgbClr val="1A1A1A"/>
                           </a:solidFill>
                         </a:rPr>
-                        <a:t>-6.9%</a:t>
+                        <a:t>-7.1%</a:t>
                       </a:r>
                     </a:p>
                   </a:txBody>
@@ -27462,7 +27462,7 @@
                             <a:srgbClr val="1A1A1A"/>
                           </a:solidFill>
                         </a:rPr>
-                        <a:t>+60.7%</a:t>
+                        <a:t>+60.4%</a:t>
                       </a:r>
                     </a:p>
                   </a:txBody>
@@ -27804,7 +27804,7 @@
                             <a:srgbClr val="1A1A1A"/>
                           </a:solidFill>
                         </a:rPr>
-                        <a:t>+23.2%</a:t>
+                        <a:t>+23.0%</a:t>
                       </a:r>
                     </a:p>
                   </a:txBody>
@@ -27870,7 +27870,7 @@
                             <a:srgbClr val="1A1A1A"/>
                           </a:solidFill>
                         </a:rPr>
-                        <a:t>74</a:t>
+                        <a:t>73</a:t>
                       </a:r>
                     </a:p>
                   </a:txBody>
@@ -27980,7 +27980,7 @@
                             <a:srgbClr val="1A1A1A"/>
                           </a:solidFill>
                         </a:rPr>
-                        <a:t>+19.7%</a:t>
+                        <a:t>+18.9%</a:t>
                       </a:r>
                     </a:p>
                   </a:txBody>
@@ -28146,7 +28146,7 @@
                             <a:srgbClr val="1A1A1A"/>
                           </a:solidFill>
                         </a:rPr>
-                        <a:t>+19.1%</a:t>
+                        <a:t>+18.9%</a:t>
                       </a:r>
                     </a:p>
                   </a:txBody>
@@ -28322,7 +28322,7 @@
                             <a:srgbClr val="1A1A1A"/>
                           </a:solidFill>
                         </a:rPr>
-                        <a:t>+13.4%</a:t>
+                        <a:t>+13.5%</a:t>
                       </a:r>
                     </a:p>
                   </a:txBody>
@@ -28488,7 +28488,7 @@
                             <a:srgbClr val="1A1A1A"/>
                           </a:solidFill>
                         </a:rPr>
-                        <a:t>+8.2%</a:t>
+                        <a:t>+8.0%</a:t>
                       </a:r>
                     </a:p>
                   </a:txBody>
@@ -28664,7 +28664,7 @@
                             <a:srgbClr val="1A1A1A"/>
                           </a:solidFill>
                         </a:rPr>
-                        <a:t>+4.5%</a:t>
+                        <a:t>+3.8%</a:t>
                       </a:r>
                     </a:p>
                   </a:txBody>
@@ -28728,7 +28728,7 @@
                             <a:srgbClr val="1A1A1A"/>
                           </a:solidFill>
                         </a:rPr>
-                        <a:t>54</a:t>
+                        <a:t>53</a:t>
                       </a:r>
                     </a:p>
                   </a:txBody>
@@ -28830,7 +28830,7 @@
                             <a:srgbClr val="1A1A1A"/>
                           </a:solidFill>
                         </a:rPr>
-                        <a:t>+3.3%</a:t>
+                        <a:t>+2.7%</a:t>
                       </a:r>
                     </a:p>
                   </a:txBody>
@@ -28874,7 +28874,7 @@
                             <a:srgbClr val="1A1A1A"/>
                           </a:solidFill>
                         </a:rPr>
-                        <a:t>Real Estate</a:t>
+                        <a:t>Financials</a:t>
                       </a:r>
                     </a:p>
                   </a:txBody>
@@ -28896,7 +28896,7 @@
                             <a:srgbClr val="1A1A1A"/>
                           </a:solidFill>
                         </a:rPr>
-                        <a:t>51</a:t>
+                        <a:t>50</a:t>
                       </a:r>
                     </a:p>
                   </a:txBody>
@@ -28940,7 +28940,7 @@
                             <a:srgbClr val="1A1A1A"/>
                           </a:solidFill>
                         </a:rPr>
-                        <a:t>17.0x</a:t>
+                        <a:t>9.0x</a:t>
                       </a:r>
                     </a:p>
                   </a:txBody>
@@ -28962,7 +28962,7 @@
                             <a:srgbClr val="1A1A1A"/>
                           </a:solidFill>
                         </a:rPr>
-                        <a:t>42.0%</a:t>
+                        <a:t>30.0%</a:t>
                       </a:r>
                     </a:p>
                   </a:txBody>
@@ -28984,7 +28984,7 @@
                             <a:srgbClr val="1A1A1A"/>
                           </a:solidFill>
                         </a:rPr>
-                        <a:t>+2.0%</a:t>
+                        <a:t>+10.0%</a:t>
                       </a:r>
                     </a:p>
                   </a:txBody>
@@ -29006,7 +29006,7 @@
                             <a:srgbClr val="1A1A1A"/>
                           </a:solidFill>
                         </a:rPr>
-                        <a:t>+0.8%</a:t>
+                        <a:t>-0.4%</a:t>
                       </a:r>
                     </a:p>
                   </a:txBody>
@@ -29050,7 +29050,7 @@
                             <a:srgbClr val="1A1A1A"/>
                           </a:solidFill>
                         </a:rPr>
-                        <a:t>Financials</a:t>
+                        <a:t>Real Estate</a:t>
                       </a:r>
                     </a:p>
                   </a:txBody>
@@ -29112,7 +29112,7 @@
                             <a:srgbClr val="1A1A1A"/>
                           </a:solidFill>
                         </a:rPr>
-                        <a:t>9.0x</a:t>
+                        <a:t>17.0x</a:t>
                       </a:r>
                     </a:p>
                   </a:txBody>
@@ -29132,7 +29132,7 @@
                             <a:srgbClr val="1A1A1A"/>
                           </a:solidFill>
                         </a:rPr>
-                        <a:t>30.0%</a:t>
+                        <a:t>42.0%</a:t>
                       </a:r>
                     </a:p>
                   </a:txBody>
@@ -29152,7 +29152,7 @@
                             <a:srgbClr val="1A1A1A"/>
                           </a:solidFill>
                         </a:rPr>
-                        <a:t>+10.0%</a:t>
+                        <a:t>+2.0%</a:t>
                       </a:r>
                     </a:p>
                   </a:txBody>
@@ -29172,7 +29172,7 @@
                             <a:srgbClr val="1A1A1A"/>
                           </a:solidFill>
                         </a:rPr>
-                        <a:t>+0.1%</a:t>
+                        <a:t>+0.2%</a:t>
                       </a:r>
                     </a:p>
                   </a:txBody>

--- a/preview/indice_SP_500/indice_SP_500.pptx
+++ b/preview/indice_SP_500/indice_SP_500.pptx
@@ -19013,7 +19013,7 @@
                   <a:srgbClr val="555555"/>
                 </a:solidFill>
               </a:rPr>
-              <a:t>Le signal global sur le S&amp;P 500 est Surponderer avec une conviction de 55% (sur la base des 11 secteurs analyses). 6 secteur(s) ressortent Surponderer — Technology, Communication Services, Industrials — portes par leur momentum positif 52 semaines. 5 secteurs sont Neutre et 0 en Sous-ponderer.</a:t>
+              <a:t>Le signal global sur le S&amp;P 500 est Surponderer avec une conviction de 55% (sur la base des 11 secteurs analyses). 6 secteur(s) ressortent Surponderer — Technology, Industrials, Communication Services — portes par leur momentum positif 52 semaines. 5 secteurs sont Neutre et 0 en Sous-ponderer.</a:t>
             </a:r>
           </a:p>
         </p:txBody>

--- a/preview/indice_SP_500/indice_SP_500.pptx
+++ b/preview/indice_SP_500/indice_SP_500.pptx
@@ -19013,7 +19013,7 @@
                   <a:srgbClr val="555555"/>
                 </a:solidFill>
               </a:rPr>
-              <a:t>Le signal global sur le S&amp;P 500 est Surponderer avec une conviction de 55% (sur la base des 11 secteurs analyses). 6 secteur(s) ressortent Surponderer — Technology, Industrials, Communication Services — portes par leur momentum positif 52 semaines. 5 secteurs sont Neutre et 0 en Sous-ponderer.</a:t>
+              <a:t>Le signal global sur le S&amp;P 500 est Surponderer avec une conviction de 55% (sur la base des 11 secteurs analyses). 6 secteur(s) ressortent Surponderer — Technology, Communication Services, Industrials — portes par leur momentum positif 52 semaines. 5 secteurs sont Neutre et 0 en Sous-ponderer.</a:t>
             </a:r>
           </a:p>
         </p:txBody>

--- a/preview/indice_SP_500/indice_SP_500.pptx
+++ b/preview/indice_SP_500/indice_SP_500.pptx
@@ -3358,7 +3358,7 @@
                   <a:srgbClr val="AAAAAA"/>
                 </a:solidFill>
               </a:rPr>
-              <a:t>^GSPC  ·  11 secteurs analyses  ·  503 societes couvertes</a:t>
+              <a:t>^GSPC  ·  11 secteurs analysés  ·  503 sociétés couvertes</a:t>
             </a:r>
           </a:p>
         </p:txBody>
@@ -18338,7 +18338,7 @@
                   <a:srgbClr val="555555"/>
                 </a:solidFill>
               </a:rPr>
-              <a:t>S&amp;P 500 (^GSPC)  ·  11 secteurs  ·  503 societes  ·  Horizon 12 mois</a:t>
+              <a:t>S&amp;P 500 (^GSPC)  ·  11 secteurs  ·  503 sociétés  ·  Horizon 12 mois</a:t>
             </a:r>
           </a:p>
         </p:txBody>
@@ -18415,7 +18415,7 @@
                   <a:srgbClr val="FFFFFF"/>
                 </a:solidFill>
               </a:rPr>
-              <a:t>SURPONDERER</a:t>
+              <a:t>SURPONDÉRER</a:t>
             </a:r>
           </a:p>
         </p:txBody>
@@ -18979,7 +18979,7 @@
                   <a:srgbClr val="1B3A6B"/>
                 </a:solidFill>
               </a:rPr>
-              <a:t>SYNTHESE DU SIGNAL</a:t>
+              <a:t>SYNTHÈSE DU SIGNAL</a:t>
             </a:r>
           </a:p>
         </p:txBody>
@@ -19013,7 +19013,7 @@
                   <a:srgbClr val="555555"/>
                 </a:solidFill>
               </a:rPr>
-              <a:t>Le signal global sur le S&amp;P 500 est Surponderer avec une conviction de 55% (sur la base des 11 secteurs analyses). 6 secteur(s) ressortent Surponderer — Technology, Communication Services, Energy — portes par leur momentum positif 52 semaines. 5 secteurs sont Neutre et 0 en Sous-ponderer.</a:t>
+              <a:t>Le signal global sur le S&amp;P 500 est Surponderer avec une conviction de 55% (sur la base des 11 secteurs analyses). 6 secteur(s) ressortent Surponderer — Technology, Communication Services, Industrials — portes par leur momentum positif 52 semaines. 5 secteurs sont Neutre et 0 en Sous-ponderer.</a:t>
             </a:r>
           </a:p>
         </p:txBody>
@@ -23057,7 +23057,7 @@
                   <a:srgbClr val="555555"/>
                 </a:solidFill>
               </a:rPr>
-              <a:t>S&amp;P 500 (^GSPC)  ·  Caracteristiques structurelles &amp; valorisation macro</a:t>
+              <a:t>S&amp;P 500 (^GSPC)  ·  Caractéristiques structurelles &amp; valorisation macro</a:t>
             </a:r>
           </a:p>
         </p:txBody>
@@ -23174,7 +23174,7 @@
                             <a:srgbClr val="FFFFFF"/>
                           </a:solidFill>
                         </a:rPr>
-                        <a:t>METRIQUE</a:t>
+                        <a:t>MÉTRIQUE</a:t>
                       </a:r>
                     </a:p>
                   </a:txBody>
@@ -23350,7 +23350,7 @@
                             <a:srgbClr val="1A1A1A"/>
                           </a:solidFill>
                         </a:rPr>
-                        <a:t>P/E Mediane 10 ans</a:t>
+                        <a:t>P/E Médiane 10 ans</a:t>
                       </a:r>
                     </a:p>
                   </a:txBody>
@@ -23484,7 +23484,7 @@
                             <a:srgbClr val="1A1A1A"/>
                           </a:solidFill>
                         </a:rPr>
-                        <a:t>Secteurs analyses</a:t>
+                        <a:t>Secteurs analysés</a:t>
                       </a:r>
                     </a:p>
                   </a:txBody>
@@ -23526,7 +23526,7 @@
                             <a:srgbClr val="1A1A1A"/>
                           </a:solidFill>
                         </a:rPr>
-                        <a:t>Societes couvertes</a:t>
+                        <a:t>Sociétés couvertes</a:t>
                       </a:r>
                     </a:p>
                   </a:txBody>
@@ -27096,7 +27096,7 @@
                   <a:srgbClr val="555555"/>
                 </a:solidFill>
               </a:rPr>
-              <a:t>11 secteurs GICS  ·  503 societes  ·  Tri par score FinSight decroissant</a:t>
+              <a:t>11 secteurs GICS  ·  503 sociétés  ·  Tri par score FinSight décroissant</a:t>
             </a:r>
           </a:p>
         </p:txBody>

--- a/preview/indice_SP_500/indice_SP_500.pptx
+++ b/preview/indice_SP_500/indice_SP_500.pptx
@@ -27380,7 +27380,7 @@
                             <a:srgbClr val="1A7A4A"/>
                           </a:solidFill>
                         </a:rPr>
-                        <a:t>Surponderer</a:t>
+                        <a:t>Surpondérer</a:t>
                       </a:r>
                     </a:p>
                   </a:txBody>
@@ -27550,7 +27550,7 @@
                             <a:srgbClr val="1A7A4A"/>
                           </a:solidFill>
                         </a:rPr>
-                        <a:t>Surponderer</a:t>
+                        <a:t>Surpondérer</a:t>
                       </a:r>
                     </a:p>
                   </a:txBody>
@@ -27722,7 +27722,7 @@
                             <a:srgbClr val="1A7A4A"/>
                           </a:solidFill>
                         </a:rPr>
-                        <a:t>Surponderer</a:t>
+                        <a:t>Surpondérer</a:t>
                       </a:r>
                     </a:p>
                   </a:txBody>
@@ -27892,7 +27892,7 @@
                             <a:srgbClr val="1A7A4A"/>
                           </a:solidFill>
                         </a:rPr>
-                        <a:t>Surponderer</a:t>
+                        <a:t>Surpondérer</a:t>
                       </a:r>
                     </a:p>
                   </a:txBody>
@@ -28064,7 +28064,7 @@
                             <a:srgbClr val="1A7A4A"/>
                           </a:solidFill>
                         </a:rPr>
-                        <a:t>Surponderer</a:t>
+                        <a:t>Surpondérer</a:t>
                       </a:r>
                     </a:p>
                   </a:txBody>
@@ -28234,7 +28234,7 @@
                             <a:srgbClr val="1A7A4A"/>
                           </a:solidFill>
                         </a:rPr>
-                        <a:t>Surponderer</a:t>
+                        <a:t>Surpondérer</a:t>
                       </a:r>
                     </a:p>
                   </a:txBody>
@@ -29300,7 +29300,7 @@
                   <a:srgbClr val="1B3A6B"/>
                 </a:solidFill>
               </a:rPr>
-              <a:t>Lecture analytique — Ce que la cartographie revele</a:t>
+              <a:t>Lecture analytique — Ce que la cartographie révèle</a:t>
             </a:r>
           </a:p>
         </p:txBody>
@@ -29334,7 +29334,7 @@
                   <a:srgbClr val="555555"/>
                 </a:solidFill>
               </a:rPr>
-              <a:t>Seuls 6 secteur(s) sur 11 franchissent le seuil Surponderer (score &gt; 65) : Energy · Technology · Industrials · Utilities · Materials · Communication Services. 0 secteur(s) en Sous-ponderer. La dispersion des scores illustre une bifurcation sectorielle marquee.</a:t>
+              <a:t>Seuls 6 secteur(s) sur 11 franchissent le seuil Surpondérer (score &gt; 65) : Energy · Technology · Industrials · Utilities · Materials · Communication Services. 0 secteur(s) en Sous-pondérer. La dispersion des scores illustre une bifurcation sectorielle marquée.</a:t>
             </a:r>
           </a:p>
         </p:txBody>

--- a/preview/indice_SP_500/indice_SP_500.pptx
+++ b/preview/indice_SP_500/indice_SP_500.pptx
@@ -5753,7 +5753,7 @@
                             <a:srgbClr val="1A1A1A"/>
                           </a:solidFill>
                         </a:rPr>
-                        <a:t>Utilities</a:t>
+                        <a:t>Materials</a:t>
                       </a:r>
                     </a:p>
                   </a:txBody>
@@ -5887,7 +5887,7 @@
                             <a:srgbClr val="1A1A1A"/>
                           </a:solidFill>
                         </a:rPr>
-                        <a:t>Materials</a:t>
+                        <a:t>Utilities</a:t>
                       </a:r>
                     </a:p>
                   </a:txBody>
@@ -19013,7 +19013,7 @@
                   <a:srgbClr val="555555"/>
                 </a:solidFill>
               </a:rPr>
-              <a:t>Le signal global sur le S&amp;P 500 est Surponderer avec une conviction de 55% (sur la base des 11 secteurs analyses). 6 secteur(s) ressortent Surponderer — Technology, Communication Services, Industrials — portes par leur momentum positif 52 semaines. 5 secteurs sont Neutre et 0 en Sous-ponderer.</a:t>
+              <a:t>Le signal global sur le S&amp;P 500 est Surponderer avec une conviction de 55% (sur la base des 11 secteurs analyses). 6 secteur(s) ressortent Surponderer — Technology, Communication Services, Energy — portes par leur momentum positif 52 semaines. 5 secteurs sont Neutre et 0 en Sous-ponderer.</a:t>
             </a:r>
           </a:p>
         </p:txBody>
@@ -20158,7 +20158,7 @@
                   <a:srgbClr val="1B3A6B"/>
                 </a:solidFill>
               </a:rPr>
-              <a:t>XLU  —  Utilities</a:t>
+              <a:t>XLB  —  Materials</a:t>
             </a:r>
           </a:p>
         </p:txBody>
@@ -20269,7 +20269,7 @@
                   <a:srgbClr val="1B3A6B"/>
                 </a:solidFill>
               </a:rPr>
-              <a:t>XLB  —  Materials</a:t>
+              <a:t>XLU  —  Utilities</a:t>
             </a:r>
           </a:p>
         </p:txBody>
@@ -27848,7 +27848,7 @@
                             <a:srgbClr val="1A1A1A"/>
                           </a:solidFill>
                         </a:rPr>
-                        <a:t>Utilities</a:t>
+                        <a:t>Materials</a:t>
                       </a:r>
                     </a:p>
                   </a:txBody>
@@ -27914,7 +27914,7 @@
                             <a:srgbClr val="1A1A1A"/>
                           </a:solidFill>
                         </a:rPr>
-                        <a:t>11.0x</a:t>
+                        <a:t>10.0x</a:t>
                       </a:r>
                     </a:p>
                   </a:txBody>
@@ -27936,7 +27936,7 @@
                             <a:srgbClr val="1A1A1A"/>
                           </a:solidFill>
                         </a:rPr>
-                        <a:t>28.0%</a:t>
+                        <a:t>16.0%</a:t>
                       </a:r>
                     </a:p>
                   </a:txBody>
@@ -27958,7 +27958,7 @@
                             <a:srgbClr val="1A1A1A"/>
                           </a:solidFill>
                         </a:rPr>
-                        <a:t>+2.5%</a:t>
+                        <a:t>+4.0%</a:t>
                       </a:r>
                     </a:p>
                   </a:txBody>
@@ -28024,7 +28024,7 @@
                             <a:srgbClr val="1A1A1A"/>
                           </a:solidFill>
                         </a:rPr>
-                        <a:t>Materials</a:t>
+                        <a:t>Utilities</a:t>
                       </a:r>
                     </a:p>
                   </a:txBody>
@@ -28086,7 +28086,7 @@
                             <a:srgbClr val="1A1A1A"/>
                           </a:solidFill>
                         </a:rPr>
-                        <a:t>10.0x</a:t>
+                        <a:t>11.0x</a:t>
                       </a:r>
                     </a:p>
                   </a:txBody>
@@ -28106,7 +28106,7 @@
                             <a:srgbClr val="1A1A1A"/>
                           </a:solidFill>
                         </a:rPr>
-                        <a:t>16.0%</a:t>
+                        <a:t>28.0%</a:t>
                       </a:r>
                     </a:p>
                   </a:txBody>
@@ -28126,7 +28126,7 @@
                             <a:srgbClr val="1A1A1A"/>
                           </a:solidFill>
                         </a:rPr>
-                        <a:t>+4.0%</a:t>
+                        <a:t>+2.5%</a:t>
                       </a:r>
                     </a:p>
                   </a:txBody>
@@ -29334,7 +29334,7 @@
                   <a:srgbClr val="555555"/>
                 </a:solidFill>
               </a:rPr>
-              <a:t>Seuls 6 secteur(s) sur 11 franchissent le seuil Surpondérer (score &gt; 65) : Energy · Technology · Industrials · Utilities · Materials · Communication Services. 0 secteur(s) en Sous-pondérer. La dispersion des scores illustre une bifurcation sectorielle marquée.</a:t>
+              <a:t>Seuls 6 secteur(s) sur 11 franchissent le seuil Surpondérer (score &gt; 65) : Energy · Technology · Industrials · Materials · Utilities · Communication Services. 0 secteur(s) en Sous-pondérer. La dispersion des scores illustre une bifurcation sectorielle marquée.</a:t>
             </a:r>
           </a:p>
         </p:txBody>

--- a/preview/indice_SP_500/indice_SP_500.pptx
+++ b/preview/indice_SP_500/indice_SP_500.pptx
@@ -3324,7 +3324,7 @@
                   <a:srgbClr val="FFFFFF"/>
                 </a:solidFill>
               </a:rPr>
-              <a:t>SURPONDERER  ·  Conviction 55 %</a:t>
+              <a:t>SURPONDÉRER  ·  Conviction 55 %</a:t>
             </a:r>
           </a:p>
         </p:txBody>
@@ -5753,7 +5753,7 @@
                             <a:srgbClr val="1A1A1A"/>
                           </a:solidFill>
                         </a:rPr>
-                        <a:t>Materials</a:t>
+                        <a:t>Utilities</a:t>
                       </a:r>
                     </a:p>
                   </a:txBody>
@@ -5887,7 +5887,7 @@
                             <a:srgbClr val="1A1A1A"/>
                           </a:solidFill>
                         </a:rPr>
-                        <a:t>Utilities</a:t>
+                        <a:t>Materials</a:t>
                       </a:r>
                     </a:p>
                   </a:txBody>
@@ -19013,7 +19013,7 @@
                   <a:srgbClr val="555555"/>
                 </a:solidFill>
               </a:rPr>
-              <a:t>Le signal global sur le S&amp;P 500 est Surponderer avec une conviction de 55% (sur la base des 11 secteurs analyses). 6 secteur(s) ressortent Surponderer — Technology, Communication Services, Energy — portes par leur momentum positif 52 semaines. 5 secteurs sont Neutre et 0 en Sous-ponderer.</a:t>
+              <a:t>Le signal global sur le S&amp;P 500 est Surponderer avec une conviction de 55% (sur la base des 11 secteurs analyses). 6 secteur(s) ressortent Surponderer — Technology, Communication Services, Industrials — portes par leur momentum positif 52 semaines. 5 secteurs sont Neutre et 0 en Sous-ponderer.</a:t>
             </a:r>
           </a:p>
         </p:txBody>
@@ -20158,7 +20158,7 @@
                   <a:srgbClr val="1B3A6B"/>
                 </a:solidFill>
               </a:rPr>
-              <a:t>XLB  —  Materials</a:t>
+              <a:t>XLU  —  Utilities</a:t>
             </a:r>
           </a:p>
         </p:txBody>
@@ -20269,7 +20269,7 @@
                   <a:srgbClr val="1B3A6B"/>
                 </a:solidFill>
               </a:rPr>
-              <a:t>XLU  —  Utilities</a:t>
+              <a:t>XLB  —  Materials</a:t>
             </a:r>
           </a:p>
         </p:txBody>
@@ -27848,7 +27848,7 @@
                             <a:srgbClr val="1A1A1A"/>
                           </a:solidFill>
                         </a:rPr>
-                        <a:t>Materials</a:t>
+                        <a:t>Utilities</a:t>
                       </a:r>
                     </a:p>
                   </a:txBody>
@@ -27914,7 +27914,7 @@
                             <a:srgbClr val="1A1A1A"/>
                           </a:solidFill>
                         </a:rPr>
-                        <a:t>10.0x</a:t>
+                        <a:t>11.0x</a:t>
                       </a:r>
                     </a:p>
                   </a:txBody>
@@ -27936,7 +27936,7 @@
                             <a:srgbClr val="1A1A1A"/>
                           </a:solidFill>
                         </a:rPr>
-                        <a:t>16.0%</a:t>
+                        <a:t>28.0%</a:t>
                       </a:r>
                     </a:p>
                   </a:txBody>
@@ -27958,7 +27958,7 @@
                             <a:srgbClr val="1A1A1A"/>
                           </a:solidFill>
                         </a:rPr>
-                        <a:t>+4.0%</a:t>
+                        <a:t>+2.5%</a:t>
                       </a:r>
                     </a:p>
                   </a:txBody>
@@ -28024,7 +28024,7 @@
                             <a:srgbClr val="1A1A1A"/>
                           </a:solidFill>
                         </a:rPr>
-                        <a:t>Utilities</a:t>
+                        <a:t>Materials</a:t>
                       </a:r>
                     </a:p>
                   </a:txBody>
@@ -28086,7 +28086,7 @@
                             <a:srgbClr val="1A1A1A"/>
                           </a:solidFill>
                         </a:rPr>
-                        <a:t>11.0x</a:t>
+                        <a:t>10.0x</a:t>
                       </a:r>
                     </a:p>
                   </a:txBody>
@@ -28106,7 +28106,7 @@
                             <a:srgbClr val="1A1A1A"/>
                           </a:solidFill>
                         </a:rPr>
-                        <a:t>28.0%</a:t>
+                        <a:t>16.0%</a:t>
                       </a:r>
                     </a:p>
                   </a:txBody>
@@ -28126,7 +28126,7 @@
                             <a:srgbClr val="1A1A1A"/>
                           </a:solidFill>
                         </a:rPr>
-                        <a:t>+2.5%</a:t>
+                        <a:t>+4.0%</a:t>
                       </a:r>
                     </a:p>
                   </a:txBody>
@@ -29334,7 +29334,7 @@
                   <a:srgbClr val="555555"/>
                 </a:solidFill>
               </a:rPr>
-              <a:t>Seuls 6 secteur(s) sur 11 franchissent le seuil Surpondérer (score &gt; 65) : Energy · Technology · Industrials · Materials · Utilities · Communication Services. 0 secteur(s) en Sous-pondérer. La dispersion des scores illustre une bifurcation sectorielle marquée.</a:t>
+              <a:t>Seuls 6 secteur(s) sur 11 franchissent le seuil Surpondérer (score &gt; 65) : Energy · Technology · Industrials · Utilities · Materials · Communication Services. 0 secteur(s) en Sous-pondérer. La dispersion des scores illustre une bifurcation sectorielle marquée.</a:t>
             </a:r>
           </a:p>
         </p:txBody>

--- a/preview/indice_SP_500/indice_SP_500.pptx
+++ b/preview/indice_SP_500/indice_SP_500.pptx
@@ -4770,7 +4770,7 @@
                   <a:srgbClr val="FFFFFF"/>
                 </a:solidFill>
               </a:rPr>
-              <a:t>Decomposition des Scores FinSight</a:t>
+              <a:t>Décomposition des Scores FinSight</a:t>
             </a:r>
           </a:p>
         </p:txBody>
@@ -5189,7 +5189,7 @@
                   <a:srgbClr val="555555"/>
                 </a:solidFill>
               </a:rPr>
-              <a:t>11 secteurs GICS  ·  Score 0-100  ·  Momentum 40 % · Revisions BPA 30 % · Valorisation 30 %</a:t>
+              <a:t>11 secteurs GICS  ·  Score 0-100  ·  Momentum 40 % · Révisions BPA 30 % · Valorisation 30 %</a:t>
             </a:r>
           </a:p>
         </p:txBody>
@@ -5753,7 +5753,7 @@
                             <a:srgbClr val="1A1A1A"/>
                           </a:solidFill>
                         </a:rPr>
-                        <a:t>Utilities</a:t>
+                        <a:t>Materials</a:t>
                       </a:r>
                     </a:p>
                   </a:txBody>
@@ -5887,7 +5887,7 @@
                             <a:srgbClr val="1A1A1A"/>
                           </a:solidFill>
                         </a:rPr>
-                        <a:t>Materials</a:t>
+                        <a:t>Utilities</a:t>
                       </a:r>
                     </a:p>
                   </a:txBody>
@@ -7173,7 +7173,7 @@
                   <a:srgbClr val="FFFFFF"/>
                 </a:solidFill>
               </a:rPr>
-              <a:t>Top 3 Secteurs Recommandes</a:t>
+              <a:t>Top 3 Secteurs Recommandés</a:t>
             </a:r>
           </a:p>
         </p:txBody>
@@ -7250,7 +7250,7 @@
                   <a:srgbClr val="AAAAAA"/>
                 </a:solidFill>
               </a:rPr>
-              <a:t>Synthese signal · Societes representatives · Zone d entree · Distribution</a:t>
+              <a:t>Synthèse signal · Sociétés représentatives · Zone d'entrée · Distribution</a:t>
             </a:r>
           </a:p>
         </p:txBody>
@@ -7379,7 +7379,7 @@
                   <a:srgbClr val="FFFFFF"/>
                 </a:solidFill>
               </a:rPr>
-              <a:t>Top 3 Secteurs — Synthese</a:t>
+              <a:t>Top 3 Secteurs — Synthèse</a:t>
             </a:r>
           </a:p>
         </p:txBody>
@@ -7798,7 +7798,7 @@
                   <a:srgbClr val="555555"/>
                 </a:solidFill>
               </a:rPr>
-              <a:t>Secteurs Surponderer  ·  Signal · Score · EV/EBITDA · Societes representatives · Catalyseur · Risque</a:t>
+              <a:t>Secteurs Surpondérer  ·  Signal · Score · EV/EBITDA · Sociétés représentatives · Catalyseur · Risque</a:t>
             </a:r>
           </a:p>
         </p:txBody>
@@ -8063,7 +8063,7 @@
                   <a:srgbClr val="1B3A6B"/>
                 </a:solidFill>
               </a:rPr>
-              <a:t>Societes representatives</a:t>
+              <a:t>Sociétés représentatives</a:t>
             </a:r>
           </a:p>
         </p:txBody>
@@ -9087,7 +9087,7 @@
                   <a:srgbClr val="1B3A6B"/>
                 </a:solidFill>
               </a:rPr>
-              <a:t>Societes representatives</a:t>
+              <a:t>Sociétés représentatives</a:t>
             </a:r>
           </a:p>
         </p:txBody>
@@ -10111,7 +10111,7 @@
                   <a:srgbClr val="1B3A6B"/>
                 </a:solidFill>
               </a:rPr>
-              <a:t>Societes representatives</a:t>
+              <a:t>Sociétés représentatives</a:t>
             </a:r>
           </a:p>
         </p:txBody>
@@ -11461,7 +11461,7 @@
                   <a:srgbClr val="555555"/>
                 </a:solidFill>
               </a:rPr>
-              <a:t>EV/EBITDA median par secteur  ·  Vert = Surponderer · Amber = Neutre · Rouge = Sous-ponderer</a:t>
+              <a:t>EV/EBITDA médian par secteur  ·  Vert = Surpondérer · Amber = Neutre · Rouge = Sous-pondérer</a:t>
             </a:r>
           </a:p>
         </p:txBody>
@@ -11813,7 +11813,7 @@
                   <a:srgbClr val="FFFFFF"/>
                 </a:solidFill>
               </a:rPr>
-              <a:t>Zone d'Entree Optimale par Secteur</a:t>
+              <a:t>Zone d'Entrée Optimale par Secteur</a:t>
             </a:r>
           </a:p>
         </p:txBody>
@@ -12232,7 +12232,7 @@
                   <a:srgbClr val="555555"/>
                 </a:solidFill>
               </a:rPr>
-              <a:t>P/E actuel vs mediane historique 10 ans  ·  Signal d entree Accumuler / Neutre / Alleger</a:t>
+              <a:t>P/E actuel vs médiane historique 10 ans  ·  Signal d'entrée Accumuler / Neutre / Alléger</a:t>
             </a:r>
           </a:p>
         </p:txBody>
@@ -12376,7 +12376,7 @@
                   <a:srgbClr val="1B3A6B"/>
                 </a:solidFill>
               </a:rPr>
-              <a:t>Lecture — Secteurs en zone d entree optimale</a:t>
+              <a:t>Lecture — Secteurs en zone d'entrée optimale</a:t>
             </a:r>
           </a:p>
         </p:txBody>
@@ -12410,7 +12410,7 @@
                   <a:srgbClr val="555555"/>
                 </a:solidFill>
               </a:rPr>
-              <a:t>Aucun secteur Surponderer offrent les meilleures zones d entree parmi les secteurs recommandes : P/E Forward inferieur ou proche de la mediane historique 10 ans — profil risque/rendement favorable. Les secteurs au-dessus de la mediane (+20 %) meritent une prudence accrue sur le point d entree.</a:t>
+              <a:t>Aucun secteur Surpondérer offrent les meilleures zones d'entrée parmi les secteurs recommandés : P/E Forward inférieur ou proche de la médiane historique 10 ans — profil risque/rendement favorable. Les secteurs au-dessus de la médiane (+20 %) méritent une prudence accrue sur le point d'entrée.</a:t>
             </a:r>
           </a:p>
         </p:txBody>
@@ -12822,7 +12822,7 @@
                   <a:srgbClr val="FFFFFF"/>
                 </a:solidFill>
               </a:rPr>
-              <a:t>Risques Macro &amp; Scenarios</a:t>
+              <a:t>Risques Macro &amp; Scénarios</a:t>
             </a:r>
           </a:p>
         </p:txBody>
@@ -13241,7 +13241,7 @@
                   <a:srgbClr val="555555"/>
                 </a:solidFill>
               </a:rPr>
-              <a:t>Analyse adversariale  ·  3 scenarios alternatifs  ·  Conditions d invalidation du signal Surponderer</a:t>
+              <a:t>Analyse adversariale  ·  3 scénarios alternatifs  ·  Conditions d'invalidation du signal Surponderer</a:t>
             </a:r>
           </a:p>
         </p:txBody>
@@ -13361,7 +13361,7 @@
                   <a:srgbClr val="FFFFFF"/>
                 </a:solidFill>
               </a:rPr>
-              <a:t>Recession technique</a:t>
+              <a:t>Récession technique</a:t>
             </a:r>
           </a:p>
         </p:txBody>
@@ -13429,7 +13429,7 @@
                   <a:srgbClr val="555555"/>
                 </a:solidFill>
               </a:rPr>
-              <a:t>Deux trimestres PIB &lt; 0 % — revision BPA -15/-20 %. Signal passerait Sous-ponderer.</a:t>
+              <a:t>Deux trimestres PIB &lt; 0 % — révision BPA -15/-20 %. Signal passerait Sous-pondérer.</a:t>
             </a:r>
           </a:p>
         </p:txBody>
@@ -13549,7 +13549,7 @@
                   <a:srgbClr val="FFFFFF"/>
                 </a:solidFill>
               </a:rPr>
-              <a:t>Resserrement Fed prolonge</a:t>
+              <a:t>Resserrement Fed prolongé</a:t>
             </a:r>
           </a:p>
         </p:txBody>
@@ -13617,7 +13617,7 @@
                   <a:srgbClr val="555555"/>
                 </a:solidFill>
               </a:rPr>
-              <a:t>Fed Funds &gt; 4,5 % jusqu en 2027 — compression multiples growth et rotation sectorielle.</a:t>
+              <a:t>Fed Funds &gt; 4,5 % jusqu'en 2027 — compression multiples growth et rotation sectorielle.</a:t>
             </a:r>
           </a:p>
         </p:txBody>
@@ -13737,7 +13737,7 @@
                   <a:srgbClr val="FFFFFF"/>
                 </a:solidFill>
               </a:rPr>
-              <a:t>Choc geopolitique</a:t>
+              <a:t>Choc géopolitique</a:t>
             </a:r>
           </a:p>
         </p:txBody>
@@ -13805,7 +13805,7 @@
                   <a:srgbClr val="555555"/>
                 </a:solidFill>
               </a:rPr>
-              <a:t>Escalade geopolitique — spike VIX &gt; 35, rotation defensive vers Consumer Staples et Health Care.</a:t>
+              <a:t>Escalade géopolitique — spike VIX &gt; 35, rotation défensive vers Consumer Staples et Health Care.</a:t>
             </a:r>
           </a:p>
         </p:txBody>
@@ -14362,7 +14362,7 @@
                   <a:srgbClr val="FFFFFF"/>
                 </a:solidFill>
               </a:rPr>
-              <a:t>Rotation Sectorielle &amp; Cycle Economique</a:t>
+              <a:t>Rotation Sectorielle &amp; Cycle Économique</a:t>
             </a:r>
           </a:p>
         </p:txBody>
@@ -14781,7 +14781,7 @@
                   <a:srgbClr val="555555"/>
                 </a:solidFill>
               </a:rPr>
-              <a:t>S&amp;P 500  ·  Phase actuelle : Expansion avancee  ·  Sensibilites taux/PIB  ·  Signal de rotation</a:t>
+              <a:t>S&amp;P 500  ·  Phase actuelle : Expansion avancee  ·  Sensibilités taux/PIB  ·  Signal de rotation</a:t>
             </a:r>
           </a:p>
         </p:txBody>
@@ -14846,7 +14846,7 @@
                             <a:srgbClr val="FFFFFF"/>
                           </a:solidFill>
                         </a:rPr>
-                        <a:t>Phase favorisee</a:t>
+                        <a:t>Phase favorisée</a:t>
                       </a:r>
                     </a:p>
                   </a:txBody>
@@ -16226,7 +16226,7 @@
                   <a:srgbClr val="1B3A6B"/>
                 </a:solidFill>
               </a:rPr>
-              <a:t>Positionnement de cycle — Synthese et catalyseur de rotation</a:t>
+              <a:t>Positionnement de cycle — Synthèse et catalyseur de rotation</a:t>
             </a:r>
           </a:p>
         </p:txBody>
@@ -20158,7 +20158,7 @@
                   <a:srgbClr val="1B3A6B"/>
                 </a:solidFill>
               </a:rPr>
-              <a:t>XLU  —  Utilities</a:t>
+              <a:t>XLB  —  Materials</a:t>
             </a:r>
           </a:p>
         </p:txBody>
@@ -20269,7 +20269,7 @@
                   <a:srgbClr val="1B3A6B"/>
                 </a:solidFill>
               </a:rPr>
-              <a:t>XLB  —  Materials</a:t>
+              <a:t>XLU  —  Utilities</a:t>
             </a:r>
           </a:p>
         </p:txBody>
@@ -20747,7 +20747,7 @@
                   <a:srgbClr val="555555"/>
                 </a:solidFill>
               </a:rPr>
-              <a:t>XLE (Energy) domine avec +60.4 % — confirmation du signal Surponderer soutenu par la monetisation IA. XLF (Financials) sous-performe (-0.4 %) en ligne avec le signal Sous-ponderer.</a:t>
+              <a:t>XLE (Energy) domine avec +60.4 % — confirmation du signal Surpondérer soutenu par la monétisation IA. XLF (Financials) sous-performe (-0.4 %) en ligne avec le signal Sous-pondérer.</a:t>
             </a:r>
           </a:p>
         </p:txBody>
@@ -21492,7 +21492,7 @@
                   <a:srgbClr val="1B3A6B"/>
                 </a:solidFill>
               </a:rPr>
-              <a:t>Synthese Macro &amp; Signal Global</a:t>
+              <a:t>Synthèse Macro &amp; Signal Global</a:t>
             </a:r>
           </a:p>
         </p:txBody>
@@ -21526,7 +21526,7 @@
                   <a:srgbClr val="555555"/>
                 </a:solidFill>
               </a:rPr>
-              <a:t>Description indice · P/E Forward · ERP Damodaran · Catalyseurs &amp; risques · Cycle economique</a:t>
+              <a:t>Description indice · P/E Forward · ERP Damodaran · Catalyseurs &amp; risques · Cycle économique</a:t>
             </a:r>
           </a:p>
         </p:txBody>
@@ -21748,7 +21748,7 @@
                   <a:srgbClr val="555555"/>
                 </a:solidFill>
               </a:rPr>
-              <a:t>11 secteurs GICS · Scores FinSight · Scatter EV/EBITDA vs croissance · Decomposition scores</a:t>
+              <a:t>11 secteurs GICS · Scores FinSight · Scatter EV/EBITDA vs croissance · Décomposition scores</a:t>
             </a:r>
           </a:p>
         </p:txBody>
@@ -21936,7 +21936,7 @@
                   <a:srgbClr val="1B3A6B"/>
                 </a:solidFill>
               </a:rPr>
-              <a:t>Top 3 Secteurs Recommandes</a:t>
+              <a:t>Top 3 Secteurs Recommandés</a:t>
             </a:r>
           </a:p>
         </p:txBody>
@@ -21970,7 +21970,7 @@
                   <a:srgbClr val="555555"/>
                 </a:solidFill>
               </a:rPr>
-              <a:t>Synthese signal · Societes representatives · Distribution valorisations · Zone d entree</a:t>
+              <a:t>Synthèse signal · Sociétés représentatives · Distribution valorisations · Zone d'entrée</a:t>
             </a:r>
           </a:p>
         </p:txBody>
@@ -22192,7 +22192,7 @@
                   <a:srgbClr val="555555"/>
                 </a:solidFill>
               </a:rPr>
-              <a:t>Scenarios alternatifs · Rotation sectorielle · FinBERT · Performance ETF</a:t>
+              <a:t>Scénarios alternatifs · Rotation sectorielle · FinBERT · Performance ETF</a:t>
             </a:r>
           </a:p>
         </p:txBody>
@@ -22432,7 +22432,7 @@
                   <a:srgbClr val="FFFFFF"/>
                 </a:solidFill>
               </a:rPr>
-              <a:t>Synthese Macro &amp; Signal Global</a:t>
+              <a:t>Synthèse Macro &amp; Signal Global</a:t>
             </a:r>
           </a:p>
         </p:txBody>
@@ -22509,7 +22509,7 @@
                   <a:srgbClr val="AAAAAA"/>
                 </a:solidFill>
               </a:rPr>
-              <a:t>Valorisation top-down · ERP · Cycle economique · Catalyseurs &amp; risques</a:t>
+              <a:t>Valorisation top-down · ERP · Cycle économique · Catalyseurs &amp; risques</a:t>
             </a:r>
           </a:p>
         </p:txBody>
@@ -26548,7 +26548,7 @@
                   <a:srgbClr val="AAAAAA"/>
                 </a:solidFill>
               </a:rPr>
-              <a:t>11 secteurs GICS · Scores · Scatter valorisation · Decomposition</a:t>
+              <a:t>11 secteurs GICS · Scores · Scatter valorisation · Décomposition</a:t>
             </a:r>
           </a:p>
         </p:txBody>
@@ -27848,7 +27848,7 @@
                             <a:srgbClr val="1A1A1A"/>
                           </a:solidFill>
                         </a:rPr>
-                        <a:t>Utilities</a:t>
+                        <a:t>Materials</a:t>
                       </a:r>
                     </a:p>
                   </a:txBody>
@@ -27914,7 +27914,7 @@
                             <a:srgbClr val="1A1A1A"/>
                           </a:solidFill>
                         </a:rPr>
-                        <a:t>11.0x</a:t>
+                        <a:t>10.0x</a:t>
                       </a:r>
                     </a:p>
                   </a:txBody>
@@ -27936,7 +27936,7 @@
                             <a:srgbClr val="1A1A1A"/>
                           </a:solidFill>
                         </a:rPr>
-                        <a:t>28.0%</a:t>
+                        <a:t>16.0%</a:t>
                       </a:r>
                     </a:p>
                   </a:txBody>
@@ -27958,7 +27958,7 @@
                             <a:srgbClr val="1A1A1A"/>
                           </a:solidFill>
                         </a:rPr>
-                        <a:t>+2.5%</a:t>
+                        <a:t>+4.0%</a:t>
                       </a:r>
                     </a:p>
                   </a:txBody>
@@ -28024,7 +28024,7 @@
                             <a:srgbClr val="1A1A1A"/>
                           </a:solidFill>
                         </a:rPr>
-                        <a:t>Materials</a:t>
+                        <a:t>Utilities</a:t>
                       </a:r>
                     </a:p>
                   </a:txBody>
@@ -28086,7 +28086,7 @@
                             <a:srgbClr val="1A1A1A"/>
                           </a:solidFill>
                         </a:rPr>
-                        <a:t>10.0x</a:t>
+                        <a:t>11.0x</a:t>
                       </a:r>
                     </a:p>
                   </a:txBody>
@@ -28106,7 +28106,7 @@
                             <a:srgbClr val="1A1A1A"/>
                           </a:solidFill>
                         </a:rPr>
-                        <a:t>16.0%</a:t>
+                        <a:t>28.0%</a:t>
                       </a:r>
                     </a:p>
                   </a:txBody>
@@ -28126,7 +28126,7 @@
                             <a:srgbClr val="1A1A1A"/>
                           </a:solidFill>
                         </a:rPr>
-                        <a:t>+4.0%</a:t>
+                        <a:t>+2.5%</a:t>
                       </a:r>
                     </a:p>
                   </a:txBody>
@@ -29334,7 +29334,7 @@
                   <a:srgbClr val="555555"/>
                 </a:solidFill>
               </a:rPr>
-              <a:t>Seuls 6 secteur(s) sur 11 franchissent le seuil Surpondérer (score &gt; 65) : Energy · Technology · Industrials · Utilities · Materials · Communication Services. 0 secteur(s) en Sous-pondérer. La dispersion des scores illustre une bifurcation sectorielle marquée.</a:t>
+              <a:t>Seuls 6 secteur(s) sur 11 franchissent le seuil Surpondérer (score &gt; 65) : Energy · Technology · Industrials · Materials · Utilities · Communication Services. 0 secteur(s) en Sous-pondérer. La dispersion des scores illustre une bifurcation sectorielle marquée.</a:t>
             </a:r>
           </a:p>
         </p:txBody>

--- a/preview/indice_SP_500/indice_SP_500.pptx
+++ b/preview/indice_SP_500/indice_SP_500.pptx
@@ -5299,7 +5299,7 @@
                             <a:srgbClr val="FFFFFF"/>
                           </a:solidFill>
                         </a:rPr>
-                        <a:t>Revisions (30%)</a:t>
+                        <a:t>Révisions (30%)</a:t>
                       </a:r>
                     </a:p>
                   </a:txBody>
@@ -5469,7 +5469,7 @@
                             <a:srgbClr val="1A7A4A"/>
                           </a:solidFill>
                         </a:rPr>
-                        <a:t>Surponderer</a:t>
+                        <a:t>Surpondérer</a:t>
                       </a:r>
                     </a:p>
                   </a:txBody>
@@ -5603,7 +5603,7 @@
                             <a:srgbClr val="1A7A4A"/>
                           </a:solidFill>
                         </a:rPr>
-                        <a:t>Surponderer</a:t>
+                        <a:t>Surpondérer</a:t>
                       </a:r>
                     </a:p>
                   </a:txBody>
@@ -5729,7 +5729,7 @@
                             <a:srgbClr val="1A7A4A"/>
                           </a:solidFill>
                         </a:rPr>
-                        <a:t>Surponderer</a:t>
+                        <a:t>Surpondérer</a:t>
                       </a:r>
                     </a:p>
                   </a:txBody>
@@ -5753,7 +5753,7 @@
                             <a:srgbClr val="1A1A1A"/>
                           </a:solidFill>
                         </a:rPr>
-                        <a:t>Materials</a:t>
+                        <a:t>Utilities</a:t>
                       </a:r>
                     </a:p>
                   </a:txBody>
@@ -5863,7 +5863,7 @@
                             <a:srgbClr val="1A7A4A"/>
                           </a:solidFill>
                         </a:rPr>
-                        <a:t>Surponderer</a:t>
+                        <a:t>Surpondérer</a:t>
                       </a:r>
                     </a:p>
                   </a:txBody>
@@ -5887,7 +5887,7 @@
                             <a:srgbClr val="1A1A1A"/>
                           </a:solidFill>
                         </a:rPr>
-                        <a:t>Utilities</a:t>
+                        <a:t>Materials</a:t>
                       </a:r>
                     </a:p>
                   </a:txBody>
@@ -5989,7 +5989,7 @@
                             <a:srgbClr val="1A7A4A"/>
                           </a:solidFill>
                         </a:rPr>
-                        <a:t>Surponderer</a:t>
+                        <a:t>Surpondérer</a:t>
                       </a:r>
                     </a:p>
                   </a:txBody>
@@ -6123,7 +6123,7 @@
                             <a:srgbClr val="1A7A4A"/>
                           </a:solidFill>
                         </a:rPr>
-                        <a:t>Surponderer</a:t>
+                        <a:t>Surpondérer</a:t>
                       </a:r>
                     </a:p>
                   </a:txBody>
@@ -6967,7 +6967,7 @@
                   <a:srgbClr val="555555"/>
                 </a:solidFill>
               </a:rPr>
-              <a:t>Energy domine avec le score le plus eleve. Le momentum (34 pts) constitue le premier signal de confirmation. Les secteurs en vert sur les 3 dimensions offrent le meilleur profil composite. Croiser avec la valorisation relative pour identifier les meilleures opportunites d entree.</a:t>
+              <a:t>Energy domine avec le score le plus élevé. Le momentum (34 pts) constitue le premier signal de confirmation. Les secteurs en vert sur les 3 dimensions offrent le meilleur profil composite. Croiser avec la valorisation relative pour identifier les meilleures opportunités d'entrée.</a:t>
             </a:r>
           </a:p>
         </p:txBody>
@@ -19013,7 +19013,7 @@
                   <a:srgbClr val="555555"/>
                 </a:solidFill>
               </a:rPr>
-              <a:t>Le signal global sur le S&amp;P 500 est Surponderer avec une conviction de 55% (sur la base des 11 secteurs analyses). 6 secteur(s) ressortent Surponderer — Technology, Communication Services, Industrials — portes par leur momentum positif 52 semaines. 5 secteurs sont Neutre et 0 en Sous-ponderer.</a:t>
+              <a:t>Le signal global sur le S&amp;P 500 est Surponderer avec une conviction de 55% (sur la base des 11 secteurs analyses). 6 secteur(s) ressortent Surponderer — Technology, Communication Services, Energy — portes par leur momentum positif 52 semaines. 5 secteurs sont Neutre et 0 en Sous-ponderer.</a:t>
             </a:r>
           </a:p>
         </p:txBody>
@@ -20158,7 +20158,7 @@
                   <a:srgbClr val="1B3A6B"/>
                 </a:solidFill>
               </a:rPr>
-              <a:t>XLB  —  Materials</a:t>
+              <a:t>XLU  —  Utilities</a:t>
             </a:r>
           </a:p>
         </p:txBody>
@@ -20269,7 +20269,7 @@
                   <a:srgbClr val="1B3A6B"/>
                 </a:solidFill>
               </a:rPr>
-              <a:t>XLU  —  Utilities</a:t>
+              <a:t>XLB  —  Materials</a:t>
             </a:r>
           </a:p>
         </p:txBody>
@@ -27848,7 +27848,7 @@
                             <a:srgbClr val="1A1A1A"/>
                           </a:solidFill>
                         </a:rPr>
-                        <a:t>Materials</a:t>
+                        <a:t>Utilities</a:t>
                       </a:r>
                     </a:p>
                   </a:txBody>
@@ -27914,7 +27914,7 @@
                             <a:srgbClr val="1A1A1A"/>
                           </a:solidFill>
                         </a:rPr>
-                        <a:t>10.0x</a:t>
+                        <a:t>11.0x</a:t>
                       </a:r>
                     </a:p>
                   </a:txBody>
@@ -27936,7 +27936,7 @@
                             <a:srgbClr val="1A1A1A"/>
                           </a:solidFill>
                         </a:rPr>
-                        <a:t>16.0%</a:t>
+                        <a:t>28.0%</a:t>
                       </a:r>
                     </a:p>
                   </a:txBody>
@@ -27958,7 +27958,7 @@
                             <a:srgbClr val="1A1A1A"/>
                           </a:solidFill>
                         </a:rPr>
-                        <a:t>+4.0%</a:t>
+                        <a:t>+2.5%</a:t>
                       </a:r>
                     </a:p>
                   </a:txBody>
@@ -28024,7 +28024,7 @@
                             <a:srgbClr val="1A1A1A"/>
                           </a:solidFill>
                         </a:rPr>
-                        <a:t>Utilities</a:t>
+                        <a:t>Materials</a:t>
                       </a:r>
                     </a:p>
                   </a:txBody>
@@ -28086,7 +28086,7 @@
                             <a:srgbClr val="1A1A1A"/>
                           </a:solidFill>
                         </a:rPr>
-                        <a:t>11.0x</a:t>
+                        <a:t>10.0x</a:t>
                       </a:r>
                     </a:p>
                   </a:txBody>
@@ -28106,7 +28106,7 @@
                             <a:srgbClr val="1A1A1A"/>
                           </a:solidFill>
                         </a:rPr>
-                        <a:t>28.0%</a:t>
+                        <a:t>16.0%</a:t>
                       </a:r>
                     </a:p>
                   </a:txBody>
@@ -28126,7 +28126,7 @@
                             <a:srgbClr val="1A1A1A"/>
                           </a:solidFill>
                         </a:rPr>
-                        <a:t>+2.5%</a:t>
+                        <a:t>+4.0%</a:t>
                       </a:r>
                     </a:p>
                   </a:txBody>
@@ -29334,7 +29334,7 @@
                   <a:srgbClr val="555555"/>
                 </a:solidFill>
               </a:rPr>
-              <a:t>Seuls 6 secteur(s) sur 11 franchissent le seuil Surpondérer (score &gt; 65) : Energy · Technology · Industrials · Materials · Utilities · Communication Services. 0 secteur(s) en Sous-pondérer. La dispersion des scores illustre une bifurcation sectorielle marquée.</a:t>
+              <a:t>Seuls 6 secteur(s) sur 11 franchissent le seuil Surpondérer (score &gt; 65) : Energy · Technology · Industrials · Utilities · Materials · Communication Services. 0 secteur(s) en Sous-pondérer. La dispersion des scores illustre une bifurcation sectorielle marquée.</a:t>
             </a:r>
           </a:p>
         </p:txBody>

--- a/preview/indice_SP_500/indice_SP_500.pptx
+++ b/preview/indice_SP_500/indice_SP_500.pptx
@@ -13241,7 +13241,7 @@
                   <a:srgbClr val="555555"/>
                 </a:solidFill>
               </a:rPr>
-              <a:t>Analyse adversariale  ·  3 scénarios alternatifs  ·  Conditions d'invalidation du signal Surponderer</a:t>
+              <a:t>Analyse adversariale  ·  3 scénarios alternatifs  ·  Conditions d'invalidation du signal Surpondérer</a:t>
             </a:r>
           </a:p>
         </p:txBody>
@@ -13882,7 +13882,7 @@
                   <a:srgbClr val="FFFFFF"/>
                 </a:solidFill>
               </a:rPr>
-              <a:t>Conditions d'invalidation du signal SURPONDERER</a:t>
+              <a:t>Conditions d'invalidation du signal SURPONDÉRER</a:t>
             </a:r>
           </a:p>
         </p:txBody>
@@ -19013,7 +19013,7 @@
                   <a:srgbClr val="555555"/>
                 </a:solidFill>
               </a:rPr>
-              <a:t>Le signal global sur le S&amp;P 500 est Surponderer avec une conviction de 55% (sur la base des 11 secteurs analyses). 6 secteur(s) ressortent Surponderer — Technology, Communication Services, Energy — portes par leur momentum positif 52 semaines. 5 secteurs sont Neutre et 0 en Sous-ponderer.</a:t>
+              <a:t>Le signal global sur le S&amp;P 500 est Surponderer avec une conviction de 55% (sur la base des 11 secteurs analyses). 6 secteur(s) ressortent Surponderer — Technology, Communication Services, Industrials — portes par leur momentum positif 52 semaines. 5 secteurs sont Neutre et 0 en Sous-ponderer.</a:t>
             </a:r>
           </a:p>
         </p:txBody>

--- a/preview/indice_SP_500/indice_SP_500.pptx
+++ b/preview/indice_SP_500/indice_SP_500.pptx
@@ -12693,7 +12693,7 @@
                   <a:srgbClr val="AAAAAA"/>
                 </a:solidFill>
               </a:rPr>
-              <a:t>Scenarios alternatifs · Rotation sectorielle · FinBERT · Performance ETF</a:t>
+              <a:t>Scénarios alternatifs · Rotation sectorielle · FinBERT · Performance ETF</a:t>
             </a:r>
           </a:p>
         </p:txBody>
@@ -19013,7 +19013,7 @@
                   <a:srgbClr val="555555"/>
                 </a:solidFill>
               </a:rPr>
-              <a:t>Le signal global sur le S&amp;P 500 est Surponderer avec une conviction de 55% (sur la base des 11 secteurs analyses). 6 secteur(s) ressortent Surponderer — Technology, Communication Services, Industrials — portes par leur momentum positif 52 semaines. 5 secteurs sont Neutre et 0 en Sous-ponderer.</a:t>
+              <a:t>Le signal global sur le S&amp;P 500 est Surponderer avec une conviction de 55% (sur la base des 11 secteurs analyses). 6 secteur(s) ressortent Surponderer — Technology, Industrials, Communication Services — portes par leur momentum positif 52 semaines. 5 secteurs sont Neutre et 0 en Sous-ponderer.</a:t>
             </a:r>
           </a:p>
         </p:txBody>

--- a/preview/indice_SP_500/indice_SP_500.pptx
+++ b/preview/indice_SP_500/indice_SP_500.pptx
@@ -19013,7 +19013,7 @@
                   <a:srgbClr val="555555"/>
                 </a:solidFill>
               </a:rPr>
-              <a:t>Le signal global sur le S&amp;P 500 est Surponderer avec une conviction de 55% (sur la base des 11 secteurs analyses). 6 secteur(s) ressortent Surponderer — Technology, Industrials, Communication Services — portes par leur momentum positif 52 semaines. 5 secteurs sont Neutre et 0 en Sous-ponderer.</a:t>
+              <a:t>Le signal global sur le S&amp;P 500 est Surponderer avec une conviction de 55% (sur la base des 11 secteurs analyses). 6 secteur(s) ressortent Surponderer — Technology, Communication Services, Energy — portes par leur momentum positif 52 semaines. 5 secteurs sont Neutre et 0 en Sous-ponderer.</a:t>
             </a:r>
           </a:p>
         </p:txBody>

--- a/preview/indice_SP_500/indice_SP_500.pptx
+++ b/preview/indice_SP_500/indice_SP_500.pptx
@@ -19116,7 +19116,7 @@
                   <a:srgbClr val="555555"/>
                 </a:solidFill>
               </a:rPr>
-              <a:t>Le signal global sur le S&amp;P 500 est Surponderer avec une conviction de 64% (sur la base des 11 secteurs analyses). 7 secteur(s) ressortent Surponderer — Technology, Consumer Discretionary, Communication Services — portes par leur momentum positif 52 semaines. 4 secteurs sont Neutre et 0 en Sous-ponderer.  Le S&amp;P 500 affiche un cours de 6 575 (YTD : -4.1%). P/E Forward — vs mediane historique 10 ans 18.2x — valorisation en ligne avec l'historique. ERP Damodaran -0.5% (prime insuffisante — prudence sur les entrees). Score composite moyen : —/100 — conviction 64 %. Secteurs a Surponderer : aucun. Secteurs a eviter : aucun. Horizon d'allocation recommande : 12 mois.</a:t>
+              <a:t>Le signal global sur le S&amp;P 500 est Surponderer avec une conviction de 64% (sur la base des 11 secteurs analyses). 7 secteur(s) ressortent Surponderer — Consumer Discretionary, Technology, Communication Services — portes par leur momentum positif 52 semaines. 4 secteurs sont Neutre et 0 en Sous-ponderer.  Le S&amp;P 500 affiche un cours de 6 575 (YTD : -4.1%). P/E Forward — vs mediane historique 10 ans 18.2x — valorisation en ligne avec l'historique. ERP Damodaran -0.5% (prime insuffisante — prudence sur les entrees). Score composite moyen : —/100 — conviction 64 %. Secteurs a Surponderer : aucun. Secteurs a eviter : aucun. Horizon d'allocation recommande : 12 mois.</a:t>
             </a:r>
           </a:p>
         </p:txBody>
@@ -23815,7 +23815,7 @@
                   <a:srgbClr val="555555"/>
                 </a:solidFill>
               </a:rPr>
-              <a:t>Signal global : Surponderer (score composite —/100). P/E Forward — vs mediane historique 18.2x — valorisation proche des normes historiques. ERP Damodaran : -0.5% (Tendu). Secteurs a Surponderer : Technology  ·  Cons. Discret.  ·  Comm. Services. Secteurs a Sous-ponderer : aucun. 4 secteur(s) en position Neutre. Horizon d'allocation recommande : 12 mois.</a:t>
+              <a:t>Signal global : Surponderer (score composite —/100). P/E Forward — vs mediane historique 18.2x — valorisation proche des normes historiques. ERP Damodaran : -0.5% (Tendu). Secteurs a Surponderer : Cons. Discret.  ·  Technology  ·  Comm. Services. Secteurs a Sous-ponderer : aucun. 4 secteur(s) en position Neutre. Horizon d'allocation recommande : 12 mois.</a:t>
             </a:r>
           </a:p>
         </p:txBody>

--- a/preview/indice_SP_500/indice_SP_500.pptx
+++ b/preview/indice_SP_500/indice_SP_500.pptx
@@ -11197,7 +11197,7 @@
         </p:nvGraphicFramePr>
         <p:xfrm>
           <a:off x="324000" y="864000"/>
-          <a:ext cx="5580000" cy="2124000"/>
+          <a:ext cx="5580000" cy="3294000"/>
         </p:xfrm>
         <a:graphic>
           <a:graphicData uri="http://schemas.openxmlformats.org/drawingml/2006/table">
@@ -11211,7 +11211,7 @@
                 <a:gridCol w="1302000"/>
                 <a:gridCol w="1116000"/>
               </a:tblGrid>
-              <a:tr h="265500">
+              <a:tr h="253384">
                 <a:tc>
                   <a:txBody>
                     <a:bodyPr/>
@@ -11301,7 +11301,7 @@
                   </a:tcPr>
                 </a:tc>
               </a:tr>
-              <a:tr h="265500">
+              <a:tr h="253384">
                 <a:tc>
                   <a:txBody>
                     <a:bodyPr/>
@@ -11315,6 +11315,604 @@
                           </a:solidFill>
                         </a:rPr>
                         <a:t>Technology</a:t>
+                      </a:r>
+                    </a:p>
+                  </a:txBody>
+                  <a:tcPr>
+                    <a:noFill/>
+                  </a:tcPr>
+                </a:tc>
+                <a:tc>
+                  <a:txBody>
+                    <a:bodyPr/>
+                    <a:lstStyle/>
+                    <a:p>
+                      <a:pPr algn="ctr"/>
+                      <a:r>
+                        <a:rPr sz="800" b="0">
+                          <a:solidFill>
+                            <a:srgbClr val="1A1A1A"/>
+                          </a:solidFill>
+                        </a:rPr>
+                        <a:t>6.3 %</a:t>
+                      </a:r>
+                    </a:p>
+                  </a:txBody>
+                  <a:tcPr>
+                    <a:noFill/>
+                  </a:tcPr>
+                </a:tc>
+                <a:tc>
+                  <a:txBody>
+                    <a:bodyPr/>
+                    <a:lstStyle/>
+                    <a:p>
+                      <a:pPr algn="ctr"/>
+                      <a:r>
+                        <a:rPr sz="800" b="0">
+                          <a:solidFill>
+                            <a:srgbClr val="1A1A1A"/>
+                          </a:solidFill>
+                        </a:rPr>
+                        <a:t>11.9 %</a:t>
+                      </a:r>
+                    </a:p>
+                  </a:txBody>
+                  <a:tcPr>
+                    <a:noFill/>
+                  </a:tcPr>
+                </a:tc>
+                <a:tc>
+                  <a:txBody>
+                    <a:bodyPr/>
+                    <a:lstStyle/>
+                    <a:p>
+                      <a:pPr algn="ctr"/>
+                      <a:r>
+                        <a:rPr sz="800" b="0">
+                          <a:solidFill>
+                            <a:srgbClr val="1A1A1A"/>
+                          </a:solidFill>
+                        </a:rPr>
+                        <a:t>9.1 %</a:t>
+                      </a:r>
+                    </a:p>
+                  </a:txBody>
+                  <a:tcPr>
+                    <a:noFill/>
+                  </a:tcPr>
+                </a:tc>
+              </a:tr>
+              <a:tr h="253384">
+                <a:tc>
+                  <a:txBody>
+                    <a:bodyPr/>
+                    <a:lstStyle/>
+                    <a:p>
+                      <a:pPr algn="ctr"/>
+                      <a:r>
+                        <a:rPr sz="800" b="0">
+                          <a:solidFill>
+                            <a:srgbClr val="1A1A1A"/>
+                          </a:solidFill>
+                        </a:rPr>
+                        <a:t>Health Care</a:t>
+                      </a:r>
+                    </a:p>
+                  </a:txBody>
+                  <a:tcPr>
+                    <a:solidFill>
+                      <a:srgbClr val="F5F7FA"/>
+                    </a:solidFill>
+                  </a:tcPr>
+                </a:tc>
+                <a:tc>
+                  <a:txBody>
+                    <a:bodyPr/>
+                    <a:lstStyle/>
+                    <a:p>
+                      <a:pPr algn="ctr"/>
+                      <a:r>
+                        <a:rPr sz="800" b="0">
+                          <a:solidFill>
+                            <a:srgbClr val="1A1A1A"/>
+                          </a:solidFill>
+                        </a:rPr>
+                        <a:t>3.7 %</a:t>
+                      </a:r>
+                    </a:p>
+                  </a:txBody>
+                  <a:tcPr>
+                    <a:solidFill>
+                      <a:srgbClr val="F5F7FA"/>
+                    </a:solidFill>
+                  </a:tcPr>
+                </a:tc>
+                <a:tc>
+                  <a:txBody>
+                    <a:bodyPr/>
+                    <a:lstStyle/>
+                    <a:p>
+                      <a:pPr algn="ctr"/>
+                      <a:r>
+                        <a:rPr sz="800" b="0">
+                          <a:solidFill>
+                            <a:srgbClr val="1A1A1A"/>
+                          </a:solidFill>
+                        </a:rPr>
+                        <a:t>7.9 %</a:t>
+                      </a:r>
+                    </a:p>
+                  </a:txBody>
+                  <a:tcPr>
+                    <a:solidFill>
+                      <a:srgbClr val="F5F7FA"/>
+                    </a:solidFill>
+                  </a:tcPr>
+                </a:tc>
+                <a:tc>
+                  <a:txBody>
+                    <a:bodyPr/>
+                    <a:lstStyle/>
+                    <a:p>
+                      <a:pPr algn="ctr"/>
+                      <a:r>
+                        <a:rPr sz="800" b="0">
+                          <a:solidFill>
+                            <a:srgbClr val="1A1A1A"/>
+                          </a:solidFill>
+                        </a:rPr>
+                        <a:t>9.1 %</a:t>
+                      </a:r>
+                    </a:p>
+                  </a:txBody>
+                  <a:tcPr>
+                    <a:solidFill>
+                      <a:srgbClr val="F5F7FA"/>
+                    </a:solidFill>
+                  </a:tcPr>
+                </a:tc>
+              </a:tr>
+              <a:tr h="253384">
+                <a:tc>
+                  <a:txBody>
+                    <a:bodyPr/>
+                    <a:lstStyle/>
+                    <a:p>
+                      <a:pPr algn="ctr"/>
+                      <a:r>
+                        <a:rPr sz="800" b="0">
+                          <a:solidFill>
+                            <a:srgbClr val="1A1A1A"/>
+                          </a:solidFill>
+                        </a:rPr>
+                        <a:t>Financials</a:t>
+                      </a:r>
+                    </a:p>
+                  </a:txBody>
+                  <a:tcPr>
+                    <a:noFill/>
+                  </a:tcPr>
+                </a:tc>
+                <a:tc>
+                  <a:txBody>
+                    <a:bodyPr/>
+                    <a:lstStyle/>
+                    <a:p>
+                      <a:pPr algn="ctr"/>
+                      <a:r>
+                        <a:rPr sz="800" b="0">
+                          <a:solidFill>
+                            <a:srgbClr val="1A1A1A"/>
+                          </a:solidFill>
+                        </a:rPr>
+                        <a:t>0.0 %</a:t>
+                      </a:r>
+                    </a:p>
+                  </a:txBody>
+                  <a:tcPr>
+                    <a:noFill/>
+                  </a:tcPr>
+                </a:tc>
+                <a:tc>
+                  <a:txBody>
+                    <a:bodyPr/>
+                    <a:lstStyle/>
+                    <a:p>
+                      <a:pPr algn="ctr"/>
+                      <a:r>
+                        <a:rPr sz="800" b="0">
+                          <a:solidFill>
+                            <a:srgbClr val="1A1A1A"/>
+                          </a:solidFill>
+                        </a:rPr>
+                        <a:t>0.0 %</a:t>
+                      </a:r>
+                    </a:p>
+                  </a:txBody>
+                  <a:tcPr>
+                    <a:noFill/>
+                  </a:tcPr>
+                </a:tc>
+                <a:tc>
+                  <a:txBody>
+                    <a:bodyPr/>
+                    <a:lstStyle/>
+                    <a:p>
+                      <a:pPr algn="ctr"/>
+                      <a:r>
+                        <a:rPr sz="800" b="0">
+                          <a:solidFill>
+                            <a:srgbClr val="1A1A1A"/>
+                          </a:solidFill>
+                        </a:rPr>
+                        <a:t>9.1 %</a:t>
+                      </a:r>
+                    </a:p>
+                  </a:txBody>
+                  <a:tcPr>
+                    <a:noFill/>
+                  </a:tcPr>
+                </a:tc>
+              </a:tr>
+              <a:tr h="253384">
+                <a:tc>
+                  <a:txBody>
+                    <a:bodyPr/>
+                    <a:lstStyle/>
+                    <a:p>
+                      <a:pPr algn="ctr"/>
+                      <a:r>
+                        <a:rPr sz="800" b="0">
+                          <a:solidFill>
+                            <a:srgbClr val="1A1A1A"/>
+                          </a:solidFill>
+                        </a:rPr>
+                        <a:t>Cons. Discret.</a:t>
+                      </a:r>
+                    </a:p>
+                  </a:txBody>
+                  <a:tcPr>
+                    <a:solidFill>
+                      <a:srgbClr val="F5F7FA"/>
+                    </a:solidFill>
+                  </a:tcPr>
+                </a:tc>
+                <a:tc>
+                  <a:txBody>
+                    <a:bodyPr/>
+                    <a:lstStyle/>
+                    <a:p>
+                      <a:pPr algn="ctr"/>
+                      <a:r>
+                        <a:rPr sz="800" b="0">
+                          <a:solidFill>
+                            <a:srgbClr val="1A1A1A"/>
+                          </a:solidFill>
+                        </a:rPr>
+                        <a:t>0.0 %</a:t>
+                      </a:r>
+                    </a:p>
+                  </a:txBody>
+                  <a:tcPr>
+                    <a:solidFill>
+                      <a:srgbClr val="F5F7FA"/>
+                    </a:solidFill>
+                  </a:tcPr>
+                </a:tc>
+                <a:tc>
+                  <a:txBody>
+                    <a:bodyPr/>
+                    <a:lstStyle/>
+                    <a:p>
+                      <a:pPr algn="ctr"/>
+                      <a:r>
+                        <a:rPr sz="800" b="0">
+                          <a:solidFill>
+                            <a:srgbClr val="1A1A1A"/>
+                          </a:solidFill>
+                        </a:rPr>
+                        <a:t>0.0 %</a:t>
+                      </a:r>
+                    </a:p>
+                  </a:txBody>
+                  <a:tcPr>
+                    <a:solidFill>
+                      <a:srgbClr val="F5F7FA"/>
+                    </a:solidFill>
+                  </a:tcPr>
+                </a:tc>
+                <a:tc>
+                  <a:txBody>
+                    <a:bodyPr/>
+                    <a:lstStyle/>
+                    <a:p>
+                      <a:pPr algn="ctr"/>
+                      <a:r>
+                        <a:rPr sz="800" b="0">
+                          <a:solidFill>
+                            <a:srgbClr val="1A1A1A"/>
+                          </a:solidFill>
+                        </a:rPr>
+                        <a:t>9.1 %</a:t>
+                      </a:r>
+                    </a:p>
+                  </a:txBody>
+                  <a:tcPr>
+                    <a:solidFill>
+                      <a:srgbClr val="F5F7FA"/>
+                    </a:solidFill>
+                  </a:tcPr>
+                </a:tc>
+              </a:tr>
+              <a:tr h="253384">
+                <a:tc>
+                  <a:txBody>
+                    <a:bodyPr/>
+                    <a:lstStyle/>
+                    <a:p>
+                      <a:pPr algn="ctr"/>
+                      <a:r>
+                        <a:rPr sz="800" b="0">
+                          <a:solidFill>
+                            <a:srgbClr val="1A1A1A"/>
+                          </a:solidFill>
+                        </a:rPr>
+                        <a:t>Comm. Services</a:t>
+                      </a:r>
+                    </a:p>
+                  </a:txBody>
+                  <a:tcPr>
+                    <a:noFill/>
+                  </a:tcPr>
+                </a:tc>
+                <a:tc>
+                  <a:txBody>
+                    <a:bodyPr/>
+                    <a:lstStyle/>
+                    <a:p>
+                      <a:pPr algn="ctr"/>
+                      <a:r>
+                        <a:rPr sz="800" b="0">
+                          <a:solidFill>
+                            <a:srgbClr val="1A1A1A"/>
+                          </a:solidFill>
+                        </a:rPr>
+                        <a:t>23.5 %</a:t>
+                      </a:r>
+                    </a:p>
+                  </a:txBody>
+                  <a:tcPr>
+                    <a:noFill/>
+                  </a:tcPr>
+                </a:tc>
+                <a:tc>
+                  <a:txBody>
+                    <a:bodyPr/>
+                    <a:lstStyle/>
+                    <a:p>
+                      <a:pPr algn="ctr"/>
+                      <a:r>
+                        <a:rPr sz="800" b="0">
+                          <a:solidFill>
+                            <a:srgbClr val="1A1A1A"/>
+                          </a:solidFill>
+                        </a:rPr>
+                        <a:t>3.5 %</a:t>
+                      </a:r>
+                    </a:p>
+                  </a:txBody>
+                  <a:tcPr>
+                    <a:noFill/>
+                  </a:tcPr>
+                </a:tc>
+                <a:tc>
+                  <a:txBody>
+                    <a:bodyPr/>
+                    <a:lstStyle/>
+                    <a:p>
+                      <a:pPr algn="ctr"/>
+                      <a:r>
+                        <a:rPr sz="800" b="0">
+                          <a:solidFill>
+                            <a:srgbClr val="1A1A1A"/>
+                          </a:solidFill>
+                        </a:rPr>
+                        <a:t>9.1 %</a:t>
+                      </a:r>
+                    </a:p>
+                  </a:txBody>
+                  <a:tcPr>
+                    <a:noFill/>
+                  </a:tcPr>
+                </a:tc>
+              </a:tr>
+              <a:tr h="253384">
+                <a:tc>
+                  <a:txBody>
+                    <a:bodyPr/>
+                    <a:lstStyle/>
+                    <a:p>
+                      <a:pPr algn="ctr"/>
+                      <a:r>
+                        <a:rPr sz="800" b="0">
+                          <a:solidFill>
+                            <a:srgbClr val="1A1A1A"/>
+                          </a:solidFill>
+                        </a:rPr>
+                        <a:t>Industrials</a:t>
+                      </a:r>
+                    </a:p>
+                  </a:txBody>
+                  <a:tcPr>
+                    <a:solidFill>
+                      <a:srgbClr val="F5F7FA"/>
+                    </a:solidFill>
+                  </a:tcPr>
+                </a:tc>
+                <a:tc>
+                  <a:txBody>
+                    <a:bodyPr/>
+                    <a:lstStyle/>
+                    <a:p>
+                      <a:pPr algn="ctr"/>
+                      <a:r>
+                        <a:rPr sz="800" b="0">
+                          <a:solidFill>
+                            <a:srgbClr val="1A1A1A"/>
+                          </a:solidFill>
+                        </a:rPr>
+                        <a:t>0.0 %</a:t>
+                      </a:r>
+                    </a:p>
+                  </a:txBody>
+                  <a:tcPr>
+                    <a:solidFill>
+                      <a:srgbClr val="F5F7FA"/>
+                    </a:solidFill>
+                  </a:tcPr>
+                </a:tc>
+                <a:tc>
+                  <a:txBody>
+                    <a:bodyPr/>
+                    <a:lstStyle/>
+                    <a:p>
+                      <a:pPr algn="ctr"/>
+                      <a:r>
+                        <a:rPr sz="800" b="0">
+                          <a:solidFill>
+                            <a:srgbClr val="1A1A1A"/>
+                          </a:solidFill>
+                        </a:rPr>
+                        <a:t>7.7 %</a:t>
+                      </a:r>
+                    </a:p>
+                  </a:txBody>
+                  <a:tcPr>
+                    <a:solidFill>
+                      <a:srgbClr val="F5F7FA"/>
+                    </a:solidFill>
+                  </a:tcPr>
+                </a:tc>
+                <a:tc>
+                  <a:txBody>
+                    <a:bodyPr/>
+                    <a:lstStyle/>
+                    <a:p>
+                      <a:pPr algn="ctr"/>
+                      <a:r>
+                        <a:rPr sz="800" b="0">
+                          <a:solidFill>
+                            <a:srgbClr val="1A1A1A"/>
+                          </a:solidFill>
+                        </a:rPr>
+                        <a:t>9.1 %</a:t>
+                      </a:r>
+                    </a:p>
+                  </a:txBody>
+                  <a:tcPr>
+                    <a:solidFill>
+                      <a:srgbClr val="F5F7FA"/>
+                    </a:solidFill>
+                  </a:tcPr>
+                </a:tc>
+              </a:tr>
+              <a:tr h="253384">
+                <a:tc>
+                  <a:txBody>
+                    <a:bodyPr/>
+                    <a:lstStyle/>
+                    <a:p>
+                      <a:pPr algn="ctr"/>
+                      <a:r>
+                        <a:rPr sz="800" b="0">
+                          <a:solidFill>
+                            <a:srgbClr val="1A1A1A"/>
+                          </a:solidFill>
+                        </a:rPr>
+                        <a:t>Cons. Staples</a:t>
+                      </a:r>
+                    </a:p>
+                  </a:txBody>
+                  <a:tcPr>
+                    <a:noFill/>
+                  </a:tcPr>
+                </a:tc>
+                <a:tc>
+                  <a:txBody>
+                    <a:bodyPr/>
+                    <a:lstStyle/>
+                    <a:p>
+                      <a:pPr algn="ctr"/>
+                      <a:r>
+                        <a:rPr sz="800" b="0">
+                          <a:solidFill>
+                            <a:srgbClr val="1A1A1A"/>
+                          </a:solidFill>
+                        </a:rPr>
+                        <a:t>36.6 %</a:t>
+                      </a:r>
+                    </a:p>
+                  </a:txBody>
+                  <a:tcPr>
+                    <a:noFill/>
+                  </a:tcPr>
+                </a:tc>
+                <a:tc>
+                  <a:txBody>
+                    <a:bodyPr/>
+                    <a:lstStyle/>
+                    <a:p>
+                      <a:pPr algn="ctr"/>
+                      <a:r>
+                        <a:rPr sz="800" b="0">
+                          <a:solidFill>
+                            <a:srgbClr val="1A1A1A"/>
+                          </a:solidFill>
+                        </a:rPr>
+                        <a:t>0.0 %</a:t>
+                      </a:r>
+                    </a:p>
+                  </a:txBody>
+                  <a:tcPr>
+                    <a:noFill/>
+                  </a:tcPr>
+                </a:tc>
+                <a:tc>
+                  <a:txBody>
+                    <a:bodyPr/>
+                    <a:lstStyle/>
+                    <a:p>
+                      <a:pPr algn="ctr"/>
+                      <a:r>
+                        <a:rPr sz="800" b="0">
+                          <a:solidFill>
+                            <a:srgbClr val="1A1A1A"/>
+                          </a:solidFill>
+                        </a:rPr>
+                        <a:t>9.1 %</a:t>
+                      </a:r>
+                    </a:p>
+                  </a:txBody>
+                  <a:tcPr>
+                    <a:noFill/>
+                  </a:tcPr>
+                </a:tc>
+              </a:tr>
+              <a:tr h="253384">
+                <a:tc>
+                  <a:txBody>
+                    <a:bodyPr/>
+                    <a:lstStyle/>
+                    <a:p>
+                      <a:pPr algn="ctr"/>
+                      <a:r>
+                        <a:rPr sz="800" b="0">
+                          <a:solidFill>
+                            <a:srgbClr val="1A1A1A"/>
+                          </a:solidFill>
+                        </a:rPr>
+                        <a:t>Energy</a:t>
                       </a:r>
                     </a:p>
                   </a:txBody>
@@ -11336,7 +11934,7 @@
                             <a:srgbClr val="1A1A1A"/>
                           </a:solidFill>
                         </a:rPr>
-                        <a:t>0.0 %</a:t>
+                        <a:t>12.3 %</a:t>
                       </a:r>
                     </a:p>
                   </a:txBody>
@@ -11358,7 +11956,7 @@
                             <a:srgbClr val="1A1A1A"/>
                           </a:solidFill>
                         </a:rPr>
-                        <a:t>20.9 %</a:t>
+                        <a:t>40.0 %</a:t>
                       </a:r>
                     </a:p>
                   </a:txBody>
@@ -11380,7 +11978,7 @@
                             <a:srgbClr val="1A1A1A"/>
                           </a:solidFill>
                         </a:rPr>
-                        <a:t>16.7 %</a:t>
+                        <a:t>9.1 %</a:t>
                       </a:r>
                     </a:p>
                   </a:txBody>
@@ -11391,7 +11989,7 @@
                   </a:tcPr>
                 </a:tc>
               </a:tr>
-              <a:tr h="265500">
+              <a:tr h="253384">
                 <a:tc>
                   <a:txBody>
                     <a:bodyPr/>
@@ -11404,7 +12002,261 @@
                             <a:srgbClr val="1A1A1A"/>
                           </a:solidFill>
                         </a:rPr>
-                        <a:t>Financials</a:t>
+                        <a:t>Real Estate</a:t>
+                      </a:r>
+                    </a:p>
+                  </a:txBody>
+                  <a:tcPr>
+                    <a:noFill/>
+                  </a:tcPr>
+                </a:tc>
+                <a:tc>
+                  <a:txBody>
+                    <a:bodyPr/>
+                    <a:lstStyle/>
+                    <a:p>
+                      <a:pPr algn="ctr"/>
+                      <a:r>
+                        <a:rPr sz="800" b="0">
+                          <a:solidFill>
+                            <a:srgbClr val="1A1A1A"/>
+                          </a:solidFill>
+                        </a:rPr>
+                        <a:t>0.0 %</a:t>
+                      </a:r>
+                    </a:p>
+                  </a:txBody>
+                  <a:tcPr>
+                    <a:noFill/>
+                  </a:tcPr>
+                </a:tc>
+                <a:tc>
+                  <a:txBody>
+                    <a:bodyPr/>
+                    <a:lstStyle/>
+                    <a:p>
+                      <a:pPr algn="ctr"/>
+                      <a:r>
+                        <a:rPr sz="800" b="0">
+                          <a:solidFill>
+                            <a:srgbClr val="1A1A1A"/>
+                          </a:solidFill>
+                        </a:rPr>
+                        <a:t>0.0 %</a:t>
+                      </a:r>
+                    </a:p>
+                  </a:txBody>
+                  <a:tcPr>
+                    <a:noFill/>
+                  </a:tcPr>
+                </a:tc>
+                <a:tc>
+                  <a:txBody>
+                    <a:bodyPr/>
+                    <a:lstStyle/>
+                    <a:p>
+                      <a:pPr algn="ctr"/>
+                      <a:r>
+                        <a:rPr sz="800" b="0">
+                          <a:solidFill>
+                            <a:srgbClr val="1A1A1A"/>
+                          </a:solidFill>
+                        </a:rPr>
+                        <a:t>9.1 %</a:t>
+                      </a:r>
+                    </a:p>
+                  </a:txBody>
+                  <a:tcPr>
+                    <a:noFill/>
+                  </a:tcPr>
+                </a:tc>
+              </a:tr>
+              <a:tr h="253384">
+                <a:tc>
+                  <a:txBody>
+                    <a:bodyPr/>
+                    <a:lstStyle/>
+                    <a:p>
+                      <a:pPr algn="ctr"/>
+                      <a:r>
+                        <a:rPr sz="800" b="0">
+                          <a:solidFill>
+                            <a:srgbClr val="1A1A1A"/>
+                          </a:solidFill>
+                        </a:rPr>
+                        <a:t>Utilities</a:t>
+                      </a:r>
+                    </a:p>
+                  </a:txBody>
+                  <a:tcPr>
+                    <a:solidFill>
+                      <a:srgbClr val="EAF4EF"/>
+                    </a:solidFill>
+                  </a:tcPr>
+                </a:tc>
+                <a:tc>
+                  <a:txBody>
+                    <a:bodyPr/>
+                    <a:lstStyle/>
+                    <a:p>
+                      <a:pPr algn="ctr"/>
+                      <a:r>
+                        <a:rPr sz="800" b="0">
+                          <a:solidFill>
+                            <a:srgbClr val="1A1A1A"/>
+                          </a:solidFill>
+                        </a:rPr>
+                        <a:t>17.6 %</a:t>
+                      </a:r>
+                    </a:p>
+                  </a:txBody>
+                  <a:tcPr>
+                    <a:solidFill>
+                      <a:srgbClr val="EAF4EF"/>
+                    </a:solidFill>
+                  </a:tcPr>
+                </a:tc>
+                <a:tc>
+                  <a:txBody>
+                    <a:bodyPr/>
+                    <a:lstStyle/>
+                    <a:p>
+                      <a:pPr algn="ctr"/>
+                      <a:r>
+                        <a:rPr sz="800" b="0">
+                          <a:solidFill>
+                            <a:srgbClr val="1A1A1A"/>
+                          </a:solidFill>
+                        </a:rPr>
+                        <a:t>29.0 %</a:t>
+                      </a:r>
+                    </a:p>
+                  </a:txBody>
+                  <a:tcPr>
+                    <a:solidFill>
+                      <a:srgbClr val="EAF4EF"/>
+                    </a:solidFill>
+                  </a:tcPr>
+                </a:tc>
+                <a:tc>
+                  <a:txBody>
+                    <a:bodyPr/>
+                    <a:lstStyle/>
+                    <a:p>
+                      <a:pPr algn="ctr"/>
+                      <a:r>
+                        <a:rPr sz="800" b="0">
+                          <a:solidFill>
+                            <a:srgbClr val="1A1A1A"/>
+                          </a:solidFill>
+                        </a:rPr>
+                        <a:t>9.1 %</a:t>
+                      </a:r>
+                    </a:p>
+                  </a:txBody>
+                  <a:tcPr>
+                    <a:solidFill>
+                      <a:srgbClr val="EAF4EF"/>
+                    </a:solidFill>
+                  </a:tcPr>
+                </a:tc>
+              </a:tr>
+              <a:tr h="253384">
+                <a:tc>
+                  <a:txBody>
+                    <a:bodyPr/>
+                    <a:lstStyle/>
+                    <a:p>
+                      <a:pPr algn="ctr"/>
+                      <a:r>
+                        <a:rPr sz="800" b="0">
+                          <a:solidFill>
+                            <a:srgbClr val="1A1A1A"/>
+                          </a:solidFill>
+                        </a:rPr>
+                        <a:t>Materials</a:t>
+                      </a:r>
+                    </a:p>
+                  </a:txBody>
+                  <a:tcPr>
+                    <a:noFill/>
+                  </a:tcPr>
+                </a:tc>
+                <a:tc>
+                  <a:txBody>
+                    <a:bodyPr/>
+                    <a:lstStyle/>
+                    <a:p>
+                      <a:pPr algn="ctr"/>
+                      <a:r>
+                        <a:rPr sz="800" b="0">
+                          <a:solidFill>
+                            <a:srgbClr val="1A1A1A"/>
+                          </a:solidFill>
+                        </a:rPr>
+                        <a:t>0.0 %</a:t>
+                      </a:r>
+                    </a:p>
+                  </a:txBody>
+                  <a:tcPr>
+                    <a:noFill/>
+                  </a:tcPr>
+                </a:tc>
+                <a:tc>
+                  <a:txBody>
+                    <a:bodyPr/>
+                    <a:lstStyle/>
+                    <a:p>
+                      <a:pPr algn="ctr"/>
+                      <a:r>
+                        <a:rPr sz="800" b="0">
+                          <a:solidFill>
+                            <a:srgbClr val="1A1A1A"/>
+                          </a:solidFill>
+                        </a:rPr>
+                        <a:t>0.0 %</a:t>
+                      </a:r>
+                    </a:p>
+                  </a:txBody>
+                  <a:tcPr>
+                    <a:noFill/>
+                  </a:tcPr>
+                </a:tc>
+                <a:tc>
+                  <a:txBody>
+                    <a:bodyPr/>
+                    <a:lstStyle/>
+                    <a:p>
+                      <a:pPr algn="ctr"/>
+                      <a:r>
+                        <a:rPr sz="800" b="0">
+                          <a:solidFill>
+                            <a:srgbClr val="1A1A1A"/>
+                          </a:solidFill>
+                        </a:rPr>
+                        <a:t>9.1 %</a:t>
+                      </a:r>
+                    </a:p>
+                  </a:txBody>
+                  <a:tcPr>
+                    <a:noFill/>
+                  </a:tcPr>
+                </a:tc>
+              </a:tr>
+              <a:tr h="253392">
+                <a:tc>
+                  <a:txBody>
+                    <a:bodyPr/>
+                    <a:lstStyle/>
+                    <a:p>
+                      <a:pPr algn="ctr"/>
+                      <a:r>
+                        <a:rPr sz="800" b="0">
+                          <a:solidFill>
+                            <a:srgbClr val="1A1A1A"/>
+                          </a:solidFill>
+                        </a:rPr>
+                        <a:t>Sharpe ratio</a:t>
                       </a:r>
                     </a:p>
                   </a:txBody>
@@ -11426,7 +12278,7 @@
                             <a:srgbClr val="1A1A1A"/>
                           </a:solidFill>
                         </a:rPr>
-                        <a:t>8.7 %</a:t>
+                        <a:t>1.17</a:t>
                       </a:r>
                     </a:p>
                   </a:txBody>
@@ -11448,7 +12300,7 @@
                             <a:srgbClr val="1A1A1A"/>
                           </a:solidFill>
                         </a:rPr>
-                        <a:t>0.0 %</a:t>
+                        <a:t>2.15</a:t>
                       </a:r>
                     </a:p>
                   </a:txBody>
@@ -11470,7 +12322,7 @@
                             <a:srgbClr val="1A1A1A"/>
                           </a:solidFill>
                         </a:rPr>
-                        <a:t>16.7 %</a:t>
+                        <a:t>1.03</a:t>
                       </a:r>
                     </a:p>
                   </a:txBody>
@@ -11478,432 +12330,6 @@
                     <a:solidFill>
                       <a:srgbClr val="F5F7FA"/>
                     </a:solidFill>
-                  </a:tcPr>
-                </a:tc>
-              </a:tr>
-              <a:tr h="265500">
-                <a:tc>
-                  <a:txBody>
-                    <a:bodyPr/>
-                    <a:lstStyle/>
-                    <a:p>
-                      <a:pPr algn="ctr"/>
-                      <a:r>
-                        <a:rPr sz="800" b="0">
-                          <a:solidFill>
-                            <a:srgbClr val="1A1A1A"/>
-                          </a:solidFill>
-                        </a:rPr>
-                        <a:t>Comm. Services</a:t>
-                      </a:r>
-                    </a:p>
-                  </a:txBody>
-                  <a:tcPr>
-                    <a:noFill/>
-                  </a:tcPr>
-                </a:tc>
-                <a:tc>
-                  <a:txBody>
-                    <a:bodyPr/>
-                    <a:lstStyle/>
-                    <a:p>
-                      <a:pPr algn="ctr"/>
-                      <a:r>
-                        <a:rPr sz="800" b="0">
-                          <a:solidFill>
-                            <a:srgbClr val="1A1A1A"/>
-                          </a:solidFill>
-                        </a:rPr>
-                        <a:t>38.6 %</a:t>
-                      </a:r>
-                    </a:p>
-                  </a:txBody>
-                  <a:tcPr>
-                    <a:noFill/>
-                  </a:tcPr>
-                </a:tc>
-                <a:tc>
-                  <a:txBody>
-                    <a:bodyPr/>
-                    <a:lstStyle/>
-                    <a:p>
-                      <a:pPr algn="ctr"/>
-                      <a:r>
-                        <a:rPr sz="800" b="0">
-                          <a:solidFill>
-                            <a:srgbClr val="1A1A1A"/>
-                          </a:solidFill>
-                        </a:rPr>
-                        <a:t>0.0 %</a:t>
-                      </a:r>
-                    </a:p>
-                  </a:txBody>
-                  <a:tcPr>
-                    <a:noFill/>
-                  </a:tcPr>
-                </a:tc>
-                <a:tc>
-                  <a:txBody>
-                    <a:bodyPr/>
-                    <a:lstStyle/>
-                    <a:p>
-                      <a:pPr algn="ctr"/>
-                      <a:r>
-                        <a:rPr sz="800" b="0">
-                          <a:solidFill>
-                            <a:srgbClr val="1A1A1A"/>
-                          </a:solidFill>
-                        </a:rPr>
-                        <a:t>16.7 %</a:t>
-                      </a:r>
-                    </a:p>
-                  </a:txBody>
-                  <a:tcPr>
-                    <a:noFill/>
-                  </a:tcPr>
-                </a:tc>
-              </a:tr>
-              <a:tr h="265500">
-                <a:tc>
-                  <a:txBody>
-                    <a:bodyPr/>
-                    <a:lstStyle/>
-                    <a:p>
-                      <a:pPr algn="ctr"/>
-                      <a:r>
-                        <a:rPr sz="800" b="0">
-                          <a:solidFill>
-                            <a:srgbClr val="1A1A1A"/>
-                          </a:solidFill>
-                        </a:rPr>
-                        <a:t>Industrials</a:t>
-                      </a:r>
-                    </a:p>
-                  </a:txBody>
-                  <a:tcPr>
-                    <a:solidFill>
-                      <a:srgbClr val="EAF4EF"/>
-                    </a:solidFill>
-                  </a:tcPr>
-                </a:tc>
-                <a:tc>
-                  <a:txBody>
-                    <a:bodyPr/>
-                    <a:lstStyle/>
-                    <a:p>
-                      <a:pPr algn="ctr"/>
-                      <a:r>
-                        <a:rPr sz="800" b="0">
-                          <a:solidFill>
-                            <a:srgbClr val="1A1A1A"/>
-                          </a:solidFill>
-                        </a:rPr>
-                        <a:t>10.6 %</a:t>
-                      </a:r>
-                    </a:p>
-                  </a:txBody>
-                  <a:tcPr>
-                    <a:solidFill>
-                      <a:srgbClr val="EAF4EF"/>
-                    </a:solidFill>
-                  </a:tcPr>
-                </a:tc>
-                <a:tc>
-                  <a:txBody>
-                    <a:bodyPr/>
-                    <a:lstStyle/>
-                    <a:p>
-                      <a:pPr algn="ctr"/>
-                      <a:r>
-                        <a:rPr sz="800" b="0">
-                          <a:solidFill>
-                            <a:srgbClr val="1A1A1A"/>
-                          </a:solidFill>
-                        </a:rPr>
-                        <a:t>39.1 %</a:t>
-                      </a:r>
-                    </a:p>
-                  </a:txBody>
-                  <a:tcPr>
-                    <a:solidFill>
-                      <a:srgbClr val="EAF4EF"/>
-                    </a:solidFill>
-                  </a:tcPr>
-                </a:tc>
-                <a:tc>
-                  <a:txBody>
-                    <a:bodyPr/>
-                    <a:lstStyle/>
-                    <a:p>
-                      <a:pPr algn="ctr"/>
-                      <a:r>
-                        <a:rPr sz="800" b="0">
-                          <a:solidFill>
-                            <a:srgbClr val="1A1A1A"/>
-                          </a:solidFill>
-                        </a:rPr>
-                        <a:t>16.7 %</a:t>
-                      </a:r>
-                    </a:p>
-                  </a:txBody>
-                  <a:tcPr>
-                    <a:solidFill>
-                      <a:srgbClr val="EAF4EF"/>
-                    </a:solidFill>
-                  </a:tcPr>
-                </a:tc>
-              </a:tr>
-              <a:tr h="265500">
-                <a:tc>
-                  <a:txBody>
-                    <a:bodyPr/>
-                    <a:lstStyle/>
-                    <a:p>
-                      <a:pPr algn="ctr"/>
-                      <a:r>
-                        <a:rPr sz="800" b="0">
-                          <a:solidFill>
-                            <a:srgbClr val="1A1A1A"/>
-                          </a:solidFill>
-                        </a:rPr>
-                        <a:t>Real Estate</a:t>
-                      </a:r>
-                    </a:p>
-                  </a:txBody>
-                  <a:tcPr>
-                    <a:noFill/>
-                  </a:tcPr>
-                </a:tc>
-                <a:tc>
-                  <a:txBody>
-                    <a:bodyPr/>
-                    <a:lstStyle/>
-                    <a:p>
-                      <a:pPr algn="ctr"/>
-                      <a:r>
-                        <a:rPr sz="800" b="0">
-                          <a:solidFill>
-                            <a:srgbClr val="1A1A1A"/>
-                          </a:solidFill>
-                        </a:rPr>
-                        <a:t>40.0 %</a:t>
-                      </a:r>
-                    </a:p>
-                  </a:txBody>
-                  <a:tcPr>
-                    <a:noFill/>
-                  </a:tcPr>
-                </a:tc>
-                <a:tc>
-                  <a:txBody>
-                    <a:bodyPr/>
-                    <a:lstStyle/>
-                    <a:p>
-                      <a:pPr algn="ctr"/>
-                      <a:r>
-                        <a:rPr sz="800" b="0">
-                          <a:solidFill>
-                            <a:srgbClr val="1A1A1A"/>
-                          </a:solidFill>
-                        </a:rPr>
-                        <a:t>0.0 %</a:t>
-                      </a:r>
-                    </a:p>
-                  </a:txBody>
-                  <a:tcPr>
-                    <a:noFill/>
-                  </a:tcPr>
-                </a:tc>
-                <a:tc>
-                  <a:txBody>
-                    <a:bodyPr/>
-                    <a:lstStyle/>
-                    <a:p>
-                      <a:pPr algn="ctr"/>
-                      <a:r>
-                        <a:rPr sz="800" b="0">
-                          <a:solidFill>
-                            <a:srgbClr val="1A1A1A"/>
-                          </a:solidFill>
-                        </a:rPr>
-                        <a:t>16.7 %</a:t>
-                      </a:r>
-                    </a:p>
-                  </a:txBody>
-                  <a:tcPr>
-                    <a:noFill/>
-                  </a:tcPr>
-                </a:tc>
-              </a:tr>
-              <a:tr h="265500">
-                <a:tc>
-                  <a:txBody>
-                    <a:bodyPr/>
-                    <a:lstStyle/>
-                    <a:p>
-                      <a:pPr algn="ctr"/>
-                      <a:r>
-                        <a:rPr sz="800" b="0">
-                          <a:solidFill>
-                            <a:srgbClr val="1A1A1A"/>
-                          </a:solidFill>
-                        </a:rPr>
-                        <a:t>Materials</a:t>
-                      </a:r>
-                    </a:p>
-                  </a:txBody>
-                  <a:tcPr>
-                    <a:solidFill>
-                      <a:srgbClr val="EAF4EF"/>
-                    </a:solidFill>
-                  </a:tcPr>
-                </a:tc>
-                <a:tc>
-                  <a:txBody>
-                    <a:bodyPr/>
-                    <a:lstStyle/>
-                    <a:p>
-                      <a:pPr algn="ctr"/>
-                      <a:r>
-                        <a:rPr sz="800" b="0">
-                          <a:solidFill>
-                            <a:srgbClr val="1A1A1A"/>
-                          </a:solidFill>
-                        </a:rPr>
-                        <a:t>2.1 %</a:t>
-                      </a:r>
-                    </a:p>
-                  </a:txBody>
-                  <a:tcPr>
-                    <a:solidFill>
-                      <a:srgbClr val="EAF4EF"/>
-                    </a:solidFill>
-                  </a:tcPr>
-                </a:tc>
-                <a:tc>
-                  <a:txBody>
-                    <a:bodyPr/>
-                    <a:lstStyle/>
-                    <a:p>
-                      <a:pPr algn="ctr"/>
-                      <a:r>
-                        <a:rPr sz="800" b="0">
-                          <a:solidFill>
-                            <a:srgbClr val="1A1A1A"/>
-                          </a:solidFill>
-                        </a:rPr>
-                        <a:t>40.0 %</a:t>
-                      </a:r>
-                    </a:p>
-                  </a:txBody>
-                  <a:tcPr>
-                    <a:solidFill>
-                      <a:srgbClr val="EAF4EF"/>
-                    </a:solidFill>
-                  </a:tcPr>
-                </a:tc>
-                <a:tc>
-                  <a:txBody>
-                    <a:bodyPr/>
-                    <a:lstStyle/>
-                    <a:p>
-                      <a:pPr algn="ctr"/>
-                      <a:r>
-                        <a:rPr sz="800" b="0">
-                          <a:solidFill>
-                            <a:srgbClr val="1A1A1A"/>
-                          </a:solidFill>
-                        </a:rPr>
-                        <a:t>16.7 %</a:t>
-                      </a:r>
-                    </a:p>
-                  </a:txBody>
-                  <a:tcPr>
-                    <a:solidFill>
-                      <a:srgbClr val="EAF4EF"/>
-                    </a:solidFill>
-                  </a:tcPr>
-                </a:tc>
-              </a:tr>
-              <a:tr h="265500">
-                <a:tc>
-                  <a:txBody>
-                    <a:bodyPr/>
-                    <a:lstStyle/>
-                    <a:p>
-                      <a:pPr algn="ctr"/>
-                      <a:r>
-                        <a:rPr sz="800" b="0">
-                          <a:solidFill>
-                            <a:srgbClr val="1A1A1A"/>
-                          </a:solidFill>
-                        </a:rPr>
-                        <a:t>Sharpe ratio</a:t>
-                      </a:r>
-                    </a:p>
-                  </a:txBody>
-                  <a:tcPr>
-                    <a:noFill/>
-                  </a:tcPr>
-                </a:tc>
-                <a:tc>
-                  <a:txBody>
-                    <a:bodyPr/>
-                    <a:lstStyle/>
-                    <a:p>
-                      <a:pPr algn="ctr"/>
-                      <a:r>
-                        <a:rPr sz="800" b="0">
-                          <a:solidFill>
-                            <a:srgbClr val="1A1A1A"/>
-                          </a:solidFill>
-                        </a:rPr>
-                        <a:t>0.50</a:t>
-                      </a:r>
-                    </a:p>
-                  </a:txBody>
-                  <a:tcPr>
-                    <a:noFill/>
-                  </a:tcPr>
-                </a:tc>
-                <a:tc>
-                  <a:txBody>
-                    <a:bodyPr/>
-                    <a:lstStyle/>
-                    <a:p>
-                      <a:pPr algn="ctr"/>
-                      <a:r>
-                        <a:rPr sz="800" b="0">
-                          <a:solidFill>
-                            <a:srgbClr val="1A1A1A"/>
-                          </a:solidFill>
-                        </a:rPr>
-                        <a:t>1.15</a:t>
-                      </a:r>
-                    </a:p>
-                  </a:txBody>
-                  <a:tcPr>
-                    <a:noFill/>
-                  </a:tcPr>
-                </a:tc>
-                <a:tc>
-                  <a:txBody>
-                    <a:bodyPr/>
-                    <a:lstStyle/>
-                    <a:p>
-                      <a:pPr algn="ctr"/>
-                      <a:r>
-                        <a:rPr sz="800" b="0">
-                          <a:solidFill>
-                            <a:srgbClr val="1A1A1A"/>
-                          </a:solidFill>
-                        </a:rPr>
-                        <a:t>0.79</a:t>
-                      </a:r>
-                    </a:p>
-                  </a:txBody>
-                  <a:tcPr>
-                    <a:noFill/>
                   </a:tcPr>
                 </a:tc>
               </a:tr>
@@ -11920,7 +12346,7 @@
         <p:spPr>
           <a:xfrm>
             <a:off x="6120000" y="864000"/>
-            <a:ext cx="2700000" cy="2124000"/>
+            <a:ext cx="2700000" cy="3294000"/>
           </a:xfrm>
           <a:prstGeom prst="rect">
             <a:avLst/>
@@ -11963,7 +12389,7 @@
         <p:spPr>
           <a:xfrm>
             <a:off x="6120000" y="864000"/>
-            <a:ext cx="43200" cy="2124000"/>
+            <a:ext cx="43200" cy="3294000"/>
           </a:xfrm>
           <a:prstGeom prst="rect">
             <a:avLst/>
@@ -12040,7 +12466,7 @@
         <p:spPr>
           <a:xfrm>
             <a:off x="6228000" y="1116000"/>
-            <a:ext cx="2520000" cy="1836000"/>
+            <a:ext cx="2520000" cy="3006000"/>
           </a:xfrm>
           <a:prstGeom prst="rect">
             <a:avLst/>
@@ -12060,9 +12486,9 @@
                   <a:srgbClr val="555555"/>
                 </a:solidFill>
               </a:rPr>
-              <a:t>Portefeuille Tangency (Max Sharpe = 1.15) : sur-allocation sur Materials — secteur offrant le meilleur ratio rendement/risque sur 52 semaines. Ce portefeuille est le plus agressif des trois.
-Min-Variance (Sharpe = 0.50) : poids dominant sur Real Estate — secteur le moins volatil sur la periode. Approche defensive, adaptee a un contexte d'incertitude elevee.
-ERC (Sharpe = 0.79) : allocation equilibree, Technology ressort dominant. Chaque secteur contribue egalement au risque total du portefeuille.
+              <a:t>Portefeuille Tangency (Max Sharpe = 2.15) : sur-allocation sur Energy — secteur offrant le meilleur ratio rendement/risque sur 52 semaines. Ce portefeuille est le plus agressif des trois.
+Min-Variance (Sharpe = 1.17) : poids dominant sur Consumer Staples — secteur le moins volatil sur la periode. Approche defensive, adaptee a un contexte d'incertitude elevee.
+ERC (Sharpe = 1.03) : allocation equilibree, Technology ressort dominant. Chaque secteur contribue egalement au risque total du portefeuille.
 Note : Basé sur rendements journaliers 52S ETF SPDR. Contraintes : poids 0-40% par secteur.</a:t>
             </a:r>
           </a:p>
@@ -19339,7 +19765,7 @@
                   <a:srgbClr val="1B3A6B"/>
                 </a:solidFill>
               </a:rPr>
-              <a:t>Résultats trimestriels des géants technologiques</a:t>
+              <a:t>Résultats trimestriels solides des géants technolo</a:t>
             </a:r>
           </a:p>
         </p:txBody>
@@ -19373,7 +19799,7 @@
                   <a:srgbClr val="555555"/>
                 </a:solidFill>
               </a:rPr>
-              <a:t>Les publications des entreprises technologiques (Apple, Microsoft, Nvidia) pourraient confirmer ou infirmer la résilienc</a:t>
+              <a:t>Les publications des entreprises technologiques pourraient dépasser les attentes, renforçant la confiance dans le moment</a:t>
             </a:r>
           </a:p>
         </p:txBody>
@@ -19450,7 +19876,7 @@
                   <a:srgbClr val="1B3A6B"/>
                 </a:solidFill>
               </a:rPr>
-              <a:t>Décisions de la Fed sur les taux</a:t>
+              <a:t>Stabilisation des anticipations de taux de la Fed</a:t>
             </a:r>
           </a:p>
         </p:txBody>
@@ -19484,7 +19910,7 @@
                   <a:srgbClr val="555555"/>
                 </a:solidFill>
               </a:rPr>
-              <a:t>Une pause prolongée dans le cycle de hausse des taux pourrait soutenir un rebond des valorisations, notamment pour les s</a:t>
+              <a:t>Un pivot dovish de la Fed ou une communication plus accommodante pourrait relancer l'appétit pour le risque sur l'indice</a:t>
             </a:r>
           </a:p>
         </p:txBody>
@@ -19561,7 +19987,7 @@
                   <a:srgbClr val="1B3A6B"/>
                 </a:solidFill>
               </a:rPr>
-              <a:t>Relance des dépenses en infrastructures</a:t>
+              <a:t>Rebond des prix des matières premières</a:t>
             </a:r>
           </a:p>
         </p:txBody>
@@ -19595,7 +20021,7 @@
                   <a:srgbClr val="555555"/>
                 </a:solidFill>
               </a:rPr>
-              <a:t>Les annonces gouvernementales sur les investissements publics pourraient bénéficier aux secteurs des Materials et de l'E</a:t>
+              <a:t>La hausse continue des prix de l'énergie et des métaux pourrait soutenir les bénéfices des secteurs Materials et Energy.</a:t>
             </a:r>
           </a:p>
         </p:txBody>
@@ -19749,7 +20175,7 @@
                   <a:srgbClr val="555555"/>
                 </a:solidFill>
               </a:rPr>
-              <a:t>Le signal global sur le S&amp;P 500 est Surpondérer avec une conviction de 64% (sur la base des 11 secteurs analyses). 7 secteur(s) ressortent Surpondérer — Technology, Health Care, Industrials — portes par leur momentum positif 52 semaines. 4 secteurs sont Neutre et 0 en Sous-ponderer.  Le S&amp;P 500 affiche un cours de 6 783 (YTD : -1.1%). P/E Forward — vs médiane historique 10 ans 18.0x — valorisation en ligne avec l'historique. ERP Damodaran -0.6% (prime insuffisante — prudence sur les entrées). Score composite moyen : 66.9/100 — conviction 64 %. Secteurs a Surponderer : aucun. Secteurs a eviter : aucun. Horizon d'allocation recommande : 12 mois.</a:t>
+              <a:t>Le signal global sur le S&amp;P 500 est Surpondérer avec une conviction de 64% (sur la base des 11 secteurs analyses). 7 secteur(s) ressortent Surpondérer — Technology, Health Care, Communication Services — portes par leur momentum positif 52 semaines. 4 secteurs sont Neutre et 0 en Sous-ponderer.  Le S&amp;P 500 affiche un cours de 6 783 (YTD : -1.1%). P/E Forward — vs médiane historique 10 ans 18.0x — valorisation en ligne avec l'historique. ERP Damodaran -0.6% (prime insuffisante — prudence sur les entrées). Score composite moyen : 66.9/100 — conviction 64 %. Secteurs a Surponderer : aucun. Secteurs a eviter : aucun. Horizon d'allocation recommande : 12 mois.</a:t>
             </a:r>
           </a:p>
         </p:txBody>
@@ -24448,7 +24874,7 @@
                   <a:srgbClr val="555555"/>
                 </a:solidFill>
               </a:rPr>
-              <a:t>Signal global : Surpondérer (score composite 66.9/100). P/E Forward — vs médiane historique 18.0x — valorisation proche des normes historiques. ERP Damodaran : -0.6% (Tendu). Secteurs a Surponderer : Technology  ·  Health Care  ·  Industrials. Secteurs a Sous-ponderer : aucun. 4 secteur(s) en position Neutre. Horizon d'allocation recommande : 12 mois.</a:t>
+              <a:t>Signal global : Surpondérer (score composite 66.9/100). P/E Forward — vs médiane historique 18.0x — valorisation proche des normes historiques. ERP Damodaran : -0.6% (Tendu). Secteurs a Surponderer : Technology  ·  Health Care  ·  Comm. Services. Secteurs a Sous-ponderer : aucun. 4 secteur(s) en position Neutre. Horizon d'allocation recommande : 12 mois.</a:t>
             </a:r>
           </a:p>
         </p:txBody>
